--- a/public/fun/pack/pptx/birthday/돌잔치_22_돌잡이중심_섬마을선착장.pptx
+++ b/public/fun/pack/pptx/birthday/돌잔치_22_돌잡이중심_섬마을선착장.pptx
@@ -3286,14 +3286,6 @@
 <file path=ppt/slides/slide1.xml><?xml version="1.0" encoding="utf-8"?>
 <p:sld xmlns:a="http://schemas.openxmlformats.org/drawingml/2006/main" xmlns:p="http://schemas.openxmlformats.org/presentationml/2006/main" xmlns:r="http://schemas.openxmlformats.org/officeDocument/2006/relationships">
   <p:cSld>
-    <p:bg>
-      <p:bgPr>
-        <a:solidFill>
-          <a:srgbClr val="EFF5FA"/>
-        </a:solidFill>
-        <a:effectLst/>
-      </p:bgPr>
-    </p:bg>
     <p:spTree>
       <p:nvGrpSpPr>
         <p:cNvPr id="1" name=""/>
@@ -3301,157 +3293,30 @@
         <p:nvPr/>
       </p:nvGrpSpPr>
       <p:grpSpPr/>
-      <p:sp>
-        <p:nvSpPr>
-          <p:cNvPr id="3" name="장식"/>
-          <p:cNvSpPr/>
+      <p:pic>
+        <p:nvPicPr>
+          <p:cNvPr id="3" name="표지 그림" descr="birthday-22.jpg"/>
+          <p:cNvPicPr>
+            <a:picLocks noChangeAspect="1"/>
+          </p:cNvPicPr>
           <p:nvPr/>
-        </p:nvSpPr>
-        <p:spPr>
-          <a:xfrm>
-            <a:off x="7315017" y="960120"/>
-            <a:ext cx="3657508" cy="5897880"/>
-          </a:xfrm>
-          <a:prstGeom prst="round2SameRect">
-            <a:avLst>
-              <a:gd name="adj1" fmla="val 50000"/>
-              <a:gd name="adj2" fmla="val 0"/>
-            </a:avLst>
-          </a:prstGeom>
-          <a:solidFill>
-            <a:srgbClr val="CEE2F3"/>
-          </a:solidFill>
-          <a:ln>
-            <a:noFill/>
-          </a:ln>
-        </p:spPr>
-        <p:txBody>
-          <a:bodyPr rtlCol="0" anchor="ctr"/>
-          <a:lstStyle/>
-          <a:p>
-            <a:pPr algn="ctr"/>
-          </a:p>
-        </p:txBody>
-      </p:sp>
-      <p:sp>
-        <p:nvSpPr>
-          <p:cNvPr id="4" name="장식"/>
-          <p:cNvSpPr/>
-          <p:nvPr/>
-        </p:nvSpPr>
-        <p:spPr>
-          <a:xfrm>
-            <a:off x="7924601" y="1783080"/>
-            <a:ext cx="2438339" cy="5074920"/>
-          </a:xfrm>
-          <a:prstGeom prst="round2SameRect">
-            <a:avLst>
-              <a:gd name="adj1" fmla="val 50000"/>
-              <a:gd name="adj2" fmla="val 0"/>
-            </a:avLst>
-          </a:prstGeom>
-          <a:solidFill>
-            <a:srgbClr val="275A86"/>
-          </a:solidFill>
-          <a:ln>
-            <a:noFill/>
-          </a:ln>
-        </p:spPr>
-        <p:txBody>
-          <a:bodyPr rtlCol="0" anchor="ctr"/>
-          <a:lstStyle/>
-          <a:p>
-            <a:pPr algn="ctr"/>
-          </a:p>
-        </p:txBody>
-      </p:sp>
-      <p:sp>
-        <p:nvSpPr>
-          <p:cNvPr id="5" name="장식"/>
-          <p:cNvSpPr/>
-          <p:nvPr/>
-        </p:nvSpPr>
-        <p:spPr>
-          <a:xfrm>
-            <a:off x="8046518" y="3017533"/>
-            <a:ext cx="2194505" cy="548626"/>
-          </a:xfrm>
-          <a:prstGeom prst="wave">
+        </p:nvPicPr>
+        <p:blipFill>
+          <a:blip r:embed="rId2"/>
+          <a:stretch>
+            <a:fillRect/>
+          </a:stretch>
+        </p:blipFill>
+        <p:spPr>
+          <a:xfrm>
+            <a:off x="0" y="0"/>
+            <a:ext cx="12191695" cy="6858000"/>
+          </a:xfrm>
+          <a:prstGeom prst="rect">
             <a:avLst/>
           </a:prstGeom>
-          <a:solidFill>
-            <a:srgbClr val="CEE2F3"/>
-          </a:solidFill>
-          <a:ln>
-            <a:noFill/>
-          </a:ln>
-        </p:spPr>
-        <p:txBody>
-          <a:bodyPr rtlCol="0" anchor="ctr"/>
-          <a:lstStyle/>
-          <a:p>
-            <a:pPr algn="ctr"/>
-          </a:p>
-        </p:txBody>
-      </p:sp>
-      <p:sp>
-        <p:nvSpPr>
-          <p:cNvPr id="6" name="장식"/>
-          <p:cNvSpPr/>
-          <p:nvPr/>
-        </p:nvSpPr>
-        <p:spPr>
-          <a:xfrm>
-            <a:off x="8046518" y="3493009"/>
-            <a:ext cx="2194505" cy="548626"/>
-          </a:xfrm>
-          <a:prstGeom prst="wave">
-            <a:avLst/>
-          </a:prstGeom>
-          <a:solidFill>
-            <a:srgbClr val="FFFFFF"/>
-          </a:solidFill>
-          <a:ln>
-            <a:noFill/>
-          </a:ln>
-        </p:spPr>
-        <p:txBody>
-          <a:bodyPr rtlCol="0" anchor="ctr"/>
-          <a:lstStyle/>
-          <a:p>
-            <a:pPr algn="ctr"/>
-          </a:p>
-        </p:txBody>
-      </p:sp>
-      <p:sp>
-        <p:nvSpPr>
-          <p:cNvPr id="7" name="장식"/>
-          <p:cNvSpPr/>
-          <p:nvPr/>
-        </p:nvSpPr>
-        <p:spPr>
-          <a:xfrm>
-            <a:off x="8046518" y="3968485"/>
-            <a:ext cx="2194505" cy="548626"/>
-          </a:xfrm>
-          <a:prstGeom prst="wave">
-            <a:avLst/>
-          </a:prstGeom>
-          <a:solidFill>
-            <a:srgbClr val="913B3E"/>
-          </a:solidFill>
-          <a:ln>
-            <a:noFill/>
-          </a:ln>
-        </p:spPr>
-        <p:txBody>
-          <a:bodyPr rtlCol="0" anchor="ctr"/>
-          <a:lstStyle/>
-          <a:p>
-            <a:pPr algn="ctr"/>
-          </a:p>
-        </p:txBody>
-      </p:sp>
+        </p:spPr>
+      </p:pic>
       <p:sp>
         <p:nvSpPr>
           <p:cNvPr id="2" name="Title 1"/>
@@ -3492,14 +3357,14 @@
       </p:sp>
       <p:sp>
         <p:nvSpPr>
-          <p:cNvPr id="8" name="한 줄 문구"/>
+          <p:cNvPr id="4" name="한 줄 문구"/>
           <p:cNvSpPr txBox="1"/>
           <p:nvPr/>
         </p:nvSpPr>
         <p:spPr>
           <a:xfrm>
-            <a:off x="853418" y="3703320"/>
-            <a:ext cx="5852013" cy="822960"/>
+            <a:off x="853418" y="3749039"/>
+            <a:ext cx="6095847" cy="822960"/>
           </a:xfrm>
           <a:prstGeom prst="rect">
             <a:avLst/>
@@ -3523,21 +3388,21 @@
                   <a:srgbClr val="122A3F"/>
                 </a:solidFill>
               </a:rPr>
-              <a:t>섬 바람 같은 웃음소리</a:t>
-            </a:r>
-          </a:p>
-        </p:txBody>
-      </p:sp>
-      <p:sp>
-        <p:nvSpPr>
-          <p:cNvPr id="9" name="안내 문구"/>
+              <a:t>돈을 잡았으면 좋겠다고 할머니가 말씀하셨습니다</a:t>
+            </a:r>
+          </a:p>
+        </p:txBody>
+      </p:sp>
+      <p:sp>
+        <p:nvSpPr>
+          <p:cNvPr id="5" name="안내 문구"/>
           <p:cNvSpPr txBox="1"/>
           <p:nvPr/>
         </p:nvSpPr>
         <p:spPr>
           <a:xfrm>
-            <a:off x="853418" y="4572000"/>
-            <a:ext cx="5852013" cy="914400"/>
+            <a:off x="853418" y="4617720"/>
+            <a:ext cx="6095847" cy="914400"/>
           </a:xfrm>
           <a:prstGeom prst="rect">
             <a:avLst/>
@@ -3561,7 +3426,7 @@
                   <a:srgbClr val="666666"/>
                 </a:solidFill>
               </a:rPr>
-              <a:t>아기 이름 · 2026. 00. 00</a:t>
+              <a:t>아기 이름 · 2027. 00. 00</a:t>
             </a:r>
           </a:p>
           <a:p>
@@ -3641,93 +3506,6 @@
       </p:sp>
       <p:sp>
         <p:nvSpPr>
-          <p:cNvPr id="4" name="장식"/>
-          <p:cNvSpPr/>
-          <p:nvPr/>
-        </p:nvSpPr>
-        <p:spPr>
-          <a:xfrm>
-            <a:off x="10655503" y="557784"/>
-            <a:ext cx="877824" cy="219456"/>
-          </a:xfrm>
-          <a:prstGeom prst="wave">
-            <a:avLst/>
-          </a:prstGeom>
-          <a:solidFill>
-            <a:srgbClr val="CEE2F3"/>
-          </a:solidFill>
-          <a:ln>
-            <a:noFill/>
-          </a:ln>
-        </p:spPr>
-        <p:txBody>
-          <a:bodyPr rtlCol="0" anchor="ctr"/>
-          <a:lstStyle/>
-          <a:p>
-            <a:pPr algn="ctr"/>
-          </a:p>
-        </p:txBody>
-      </p:sp>
-      <p:sp>
-        <p:nvSpPr>
-          <p:cNvPr id="5" name="장식"/>
-          <p:cNvSpPr/>
-          <p:nvPr/>
-        </p:nvSpPr>
-        <p:spPr>
-          <a:xfrm>
-            <a:off x="10655503" y="747979"/>
-            <a:ext cx="877824" cy="219456"/>
-          </a:xfrm>
-          <a:prstGeom prst="wave">
-            <a:avLst/>
-          </a:prstGeom>
-          <a:solidFill>
-            <a:srgbClr val="275A86"/>
-          </a:solidFill>
-          <a:ln>
-            <a:noFill/>
-          </a:ln>
-        </p:spPr>
-        <p:txBody>
-          <a:bodyPr rtlCol="0" anchor="ctr"/>
-          <a:lstStyle/>
-          <a:p>
-            <a:pPr algn="ctr"/>
-          </a:p>
-        </p:txBody>
-      </p:sp>
-      <p:sp>
-        <p:nvSpPr>
-          <p:cNvPr id="6" name="장식"/>
-          <p:cNvSpPr/>
-          <p:nvPr/>
-        </p:nvSpPr>
-        <p:spPr>
-          <a:xfrm>
-            <a:off x="10655503" y="938174"/>
-            <a:ext cx="877824" cy="219456"/>
-          </a:xfrm>
-          <a:prstGeom prst="wave">
-            <a:avLst/>
-          </a:prstGeom>
-          <a:solidFill>
-            <a:srgbClr val="913B3E"/>
-          </a:solidFill>
-          <a:ln>
-            <a:noFill/>
-          </a:ln>
-        </p:spPr>
-        <p:txBody>
-          <a:bodyPr rtlCol="0" anchor="ctr"/>
-          <a:lstStyle/>
-          <a:p>
-            <a:pPr algn="ctr"/>
-          </a:p>
-        </p:txBody>
-      </p:sp>
-      <p:sp>
-        <p:nvSpPr>
           <p:cNvPr id="2" name="Title 1"/>
           <p:cNvSpPr>
             <a:spLocks noGrp="1"/>
@@ -3766,7 +3544,7 @@
       </p:sp>
       <p:sp>
         <p:nvSpPr>
-          <p:cNvPr id="7" name="사진 자리"/>
+          <p:cNvPr id="4" name="사진 자리"/>
           <p:cNvSpPr/>
           <p:nvPr/>
         </p:nvSpPr>
@@ -3814,7 +3592,7 @@
       </p:sp>
       <p:graphicFrame>
         <p:nvGraphicFramePr>
-          <p:cNvPr id="8" name="표"/>
+          <p:cNvPr id="5" name="표"/>
           <p:cNvGraphicFramePr>
             <a:graphicFrameLocks noGrp="1"/>
           </p:cNvGraphicFramePr>
@@ -4462,93 +4240,6 @@
       </p:sp>
       <p:sp>
         <p:nvSpPr>
-          <p:cNvPr id="4" name="장식"/>
-          <p:cNvSpPr/>
-          <p:nvPr/>
-        </p:nvSpPr>
-        <p:spPr>
-          <a:xfrm>
-            <a:off x="10655503" y="557784"/>
-            <a:ext cx="877824" cy="219456"/>
-          </a:xfrm>
-          <a:prstGeom prst="wave">
-            <a:avLst/>
-          </a:prstGeom>
-          <a:solidFill>
-            <a:srgbClr val="CEE2F3"/>
-          </a:solidFill>
-          <a:ln>
-            <a:noFill/>
-          </a:ln>
-        </p:spPr>
-        <p:txBody>
-          <a:bodyPr rtlCol="0" anchor="ctr"/>
-          <a:lstStyle/>
-          <a:p>
-            <a:pPr algn="ctr"/>
-          </a:p>
-        </p:txBody>
-      </p:sp>
-      <p:sp>
-        <p:nvSpPr>
-          <p:cNvPr id="5" name="장식"/>
-          <p:cNvSpPr/>
-          <p:nvPr/>
-        </p:nvSpPr>
-        <p:spPr>
-          <a:xfrm>
-            <a:off x="10655503" y="747979"/>
-            <a:ext cx="877824" cy="219456"/>
-          </a:xfrm>
-          <a:prstGeom prst="wave">
-            <a:avLst/>
-          </a:prstGeom>
-          <a:solidFill>
-            <a:srgbClr val="275A86"/>
-          </a:solidFill>
-          <a:ln>
-            <a:noFill/>
-          </a:ln>
-        </p:spPr>
-        <p:txBody>
-          <a:bodyPr rtlCol="0" anchor="ctr"/>
-          <a:lstStyle/>
-          <a:p>
-            <a:pPr algn="ctr"/>
-          </a:p>
-        </p:txBody>
-      </p:sp>
-      <p:sp>
-        <p:nvSpPr>
-          <p:cNvPr id="6" name="장식"/>
-          <p:cNvSpPr/>
-          <p:nvPr/>
-        </p:nvSpPr>
-        <p:spPr>
-          <a:xfrm>
-            <a:off x="10655503" y="938174"/>
-            <a:ext cx="877824" cy="219456"/>
-          </a:xfrm>
-          <a:prstGeom prst="wave">
-            <a:avLst/>
-          </a:prstGeom>
-          <a:solidFill>
-            <a:srgbClr val="913B3E"/>
-          </a:solidFill>
-          <a:ln>
-            <a:noFill/>
-          </a:ln>
-        </p:spPr>
-        <p:txBody>
-          <a:bodyPr rtlCol="0" anchor="ctr"/>
-          <a:lstStyle/>
-          <a:p>
-            <a:pPr algn="ctr"/>
-          </a:p>
-        </p:txBody>
-      </p:sp>
-      <p:sp>
-        <p:nvSpPr>
           <p:cNvPr id="2" name="Title 1"/>
           <p:cNvSpPr>
             <a:spLocks noGrp="1"/>
@@ -4587,7 +4278,7 @@
       </p:sp>
       <p:sp>
         <p:nvSpPr>
-          <p:cNvPr id="7" name="카드 1"/>
+          <p:cNvPr id="4" name="카드 1"/>
           <p:cNvSpPr/>
           <p:nvPr/>
         </p:nvSpPr>
@@ -4620,7 +4311,7 @@
       </p:sp>
       <p:sp>
         <p:nvSpPr>
-          <p:cNvPr id="8" name="번호 1"/>
+          <p:cNvPr id="5" name="번호 1"/>
           <p:cNvSpPr/>
           <p:nvPr/>
         </p:nvSpPr>
@@ -4663,7 +4354,7 @@
       </p:sp>
       <p:sp>
         <p:nvSpPr>
-          <p:cNvPr id="9" name="TextBox 8"/>
+          <p:cNvPr id="6" name="TextBox 5"/>
           <p:cNvSpPr txBox="1"/>
           <p:nvPr/>
         </p:nvSpPr>
@@ -4701,7 +4392,7 @@
       </p:sp>
       <p:sp>
         <p:nvSpPr>
-          <p:cNvPr id="10" name="TextBox 9"/>
+          <p:cNvPr id="7" name="TextBox 6"/>
           <p:cNvSpPr txBox="1"/>
           <p:nvPr/>
         </p:nvSpPr>
@@ -4739,7 +4430,7 @@
       </p:sp>
       <p:sp>
         <p:nvSpPr>
-          <p:cNvPr id="11" name="카드 2"/>
+          <p:cNvPr id="8" name="카드 2"/>
           <p:cNvSpPr/>
           <p:nvPr/>
         </p:nvSpPr>
@@ -4772,7 +4463,7 @@
       </p:sp>
       <p:sp>
         <p:nvSpPr>
-          <p:cNvPr id="12" name="번호 2"/>
+          <p:cNvPr id="9" name="번호 2"/>
           <p:cNvSpPr/>
           <p:nvPr/>
         </p:nvSpPr>
@@ -4815,7 +4506,7 @@
       </p:sp>
       <p:sp>
         <p:nvSpPr>
-          <p:cNvPr id="13" name="TextBox 12"/>
+          <p:cNvPr id="10" name="TextBox 9"/>
           <p:cNvSpPr txBox="1"/>
           <p:nvPr/>
         </p:nvSpPr>
@@ -4853,7 +4544,7 @@
       </p:sp>
       <p:sp>
         <p:nvSpPr>
-          <p:cNvPr id="14" name="TextBox 13"/>
+          <p:cNvPr id="11" name="TextBox 10"/>
           <p:cNvSpPr txBox="1"/>
           <p:nvPr/>
         </p:nvSpPr>
@@ -4891,7 +4582,7 @@
       </p:sp>
       <p:sp>
         <p:nvSpPr>
-          <p:cNvPr id="15" name="카드 3"/>
+          <p:cNvPr id="12" name="카드 3"/>
           <p:cNvSpPr/>
           <p:nvPr/>
         </p:nvSpPr>
@@ -4924,7 +4615,7 @@
       </p:sp>
       <p:sp>
         <p:nvSpPr>
-          <p:cNvPr id="16" name="번호 3"/>
+          <p:cNvPr id="13" name="번호 3"/>
           <p:cNvSpPr/>
           <p:nvPr/>
         </p:nvSpPr>
@@ -4967,7 +4658,7 @@
       </p:sp>
       <p:sp>
         <p:nvSpPr>
-          <p:cNvPr id="17" name="TextBox 16"/>
+          <p:cNvPr id="14" name="TextBox 13"/>
           <p:cNvSpPr txBox="1"/>
           <p:nvPr/>
         </p:nvSpPr>
@@ -5005,7 +4696,7 @@
       </p:sp>
       <p:sp>
         <p:nvSpPr>
-          <p:cNvPr id="18" name="TextBox 17"/>
+          <p:cNvPr id="15" name="TextBox 14"/>
           <p:cNvSpPr txBox="1"/>
           <p:nvPr/>
         </p:nvSpPr>
@@ -5043,7 +4734,7 @@
       </p:sp>
       <p:sp>
         <p:nvSpPr>
-          <p:cNvPr id="19" name="카드 4"/>
+          <p:cNvPr id="16" name="카드 4"/>
           <p:cNvSpPr/>
           <p:nvPr/>
         </p:nvSpPr>
@@ -5076,7 +4767,7 @@
       </p:sp>
       <p:sp>
         <p:nvSpPr>
-          <p:cNvPr id="20" name="번호 4"/>
+          <p:cNvPr id="17" name="번호 4"/>
           <p:cNvSpPr/>
           <p:nvPr/>
         </p:nvSpPr>
@@ -5119,7 +4810,7 @@
       </p:sp>
       <p:sp>
         <p:nvSpPr>
-          <p:cNvPr id="21" name="TextBox 20"/>
+          <p:cNvPr id="18" name="TextBox 17"/>
           <p:cNvSpPr txBox="1"/>
           <p:nvPr/>
         </p:nvSpPr>
@@ -5157,7 +4848,7 @@
       </p:sp>
       <p:sp>
         <p:nvSpPr>
-          <p:cNvPr id="22" name="TextBox 21"/>
+          <p:cNvPr id="19" name="TextBox 18"/>
           <p:cNvSpPr txBox="1"/>
           <p:nvPr/>
         </p:nvSpPr>
@@ -5253,93 +4944,6 @@
       </p:sp>
       <p:sp>
         <p:nvSpPr>
-          <p:cNvPr id="4" name="장식"/>
-          <p:cNvSpPr/>
-          <p:nvPr/>
-        </p:nvSpPr>
-        <p:spPr>
-          <a:xfrm>
-            <a:off x="10655503" y="557784"/>
-            <a:ext cx="877824" cy="219456"/>
-          </a:xfrm>
-          <a:prstGeom prst="wave">
-            <a:avLst/>
-          </a:prstGeom>
-          <a:solidFill>
-            <a:srgbClr val="CEE2F3"/>
-          </a:solidFill>
-          <a:ln>
-            <a:noFill/>
-          </a:ln>
-        </p:spPr>
-        <p:txBody>
-          <a:bodyPr rtlCol="0" anchor="ctr"/>
-          <a:lstStyle/>
-          <a:p>
-            <a:pPr algn="ctr"/>
-          </a:p>
-        </p:txBody>
-      </p:sp>
-      <p:sp>
-        <p:nvSpPr>
-          <p:cNvPr id="5" name="장식"/>
-          <p:cNvSpPr/>
-          <p:nvPr/>
-        </p:nvSpPr>
-        <p:spPr>
-          <a:xfrm>
-            <a:off x="10655503" y="747979"/>
-            <a:ext cx="877824" cy="219456"/>
-          </a:xfrm>
-          <a:prstGeom prst="wave">
-            <a:avLst/>
-          </a:prstGeom>
-          <a:solidFill>
-            <a:srgbClr val="275A86"/>
-          </a:solidFill>
-          <a:ln>
-            <a:noFill/>
-          </a:ln>
-        </p:spPr>
-        <p:txBody>
-          <a:bodyPr rtlCol="0" anchor="ctr"/>
-          <a:lstStyle/>
-          <a:p>
-            <a:pPr algn="ctr"/>
-          </a:p>
-        </p:txBody>
-      </p:sp>
-      <p:sp>
-        <p:nvSpPr>
-          <p:cNvPr id="6" name="장식"/>
-          <p:cNvSpPr/>
-          <p:nvPr/>
-        </p:nvSpPr>
-        <p:spPr>
-          <a:xfrm>
-            <a:off x="10655503" y="938174"/>
-            <a:ext cx="877824" cy="219456"/>
-          </a:xfrm>
-          <a:prstGeom prst="wave">
-            <a:avLst/>
-          </a:prstGeom>
-          <a:solidFill>
-            <a:srgbClr val="913B3E"/>
-          </a:solidFill>
-          <a:ln>
-            <a:noFill/>
-          </a:ln>
-        </p:spPr>
-        <p:txBody>
-          <a:bodyPr rtlCol="0" anchor="ctr"/>
-          <a:lstStyle/>
-          <a:p>
-            <a:pPr algn="ctr"/>
-          </a:p>
-        </p:txBody>
-      </p:sp>
-      <p:sp>
-        <p:nvSpPr>
           <p:cNvPr id="2" name="Title 1"/>
           <p:cNvSpPr>
             <a:spLocks noGrp="1"/>
@@ -5378,7 +4982,7 @@
       </p:sp>
       <p:sp>
         <p:nvSpPr>
-          <p:cNvPr id="7" name="사진 자리"/>
+          <p:cNvPr id="4" name="사진 자리"/>
           <p:cNvSpPr/>
           <p:nvPr/>
         </p:nvSpPr>
@@ -5426,7 +5030,7 @@
       </p:sp>
       <p:sp>
         <p:nvSpPr>
-          <p:cNvPr id="8" name="선택 칸"/>
+          <p:cNvPr id="5" name="선택 칸"/>
           <p:cNvSpPr/>
           <p:nvPr/>
         </p:nvSpPr>
@@ -5459,7 +5063,7 @@
       </p:sp>
       <p:sp>
         <p:nvSpPr>
-          <p:cNvPr id="9" name="TextBox 8"/>
+          <p:cNvPr id="6" name="TextBox 5"/>
           <p:cNvSpPr txBox="1"/>
           <p:nvPr/>
         </p:nvSpPr>
@@ -5615,93 +5219,6 @@
       </p:sp>
       <p:sp>
         <p:nvSpPr>
-          <p:cNvPr id="4" name="장식"/>
-          <p:cNvSpPr/>
-          <p:nvPr/>
-        </p:nvSpPr>
-        <p:spPr>
-          <a:xfrm>
-            <a:off x="10655503" y="557784"/>
-            <a:ext cx="877824" cy="219456"/>
-          </a:xfrm>
-          <a:prstGeom prst="wave">
-            <a:avLst/>
-          </a:prstGeom>
-          <a:solidFill>
-            <a:srgbClr val="CEE2F3"/>
-          </a:solidFill>
-          <a:ln>
-            <a:noFill/>
-          </a:ln>
-        </p:spPr>
-        <p:txBody>
-          <a:bodyPr rtlCol="0" anchor="ctr"/>
-          <a:lstStyle/>
-          <a:p>
-            <a:pPr algn="ctr"/>
-          </a:p>
-        </p:txBody>
-      </p:sp>
-      <p:sp>
-        <p:nvSpPr>
-          <p:cNvPr id="5" name="장식"/>
-          <p:cNvSpPr/>
-          <p:nvPr/>
-        </p:nvSpPr>
-        <p:spPr>
-          <a:xfrm>
-            <a:off x="10655503" y="747979"/>
-            <a:ext cx="877824" cy="219456"/>
-          </a:xfrm>
-          <a:prstGeom prst="wave">
-            <a:avLst/>
-          </a:prstGeom>
-          <a:solidFill>
-            <a:srgbClr val="275A86"/>
-          </a:solidFill>
-          <a:ln>
-            <a:noFill/>
-          </a:ln>
-        </p:spPr>
-        <p:txBody>
-          <a:bodyPr rtlCol="0" anchor="ctr"/>
-          <a:lstStyle/>
-          <a:p>
-            <a:pPr algn="ctr"/>
-          </a:p>
-        </p:txBody>
-      </p:sp>
-      <p:sp>
-        <p:nvSpPr>
-          <p:cNvPr id="6" name="장식"/>
-          <p:cNvSpPr/>
-          <p:nvPr/>
-        </p:nvSpPr>
-        <p:spPr>
-          <a:xfrm>
-            <a:off x="10655503" y="938174"/>
-            <a:ext cx="877824" cy="219456"/>
-          </a:xfrm>
-          <a:prstGeom prst="wave">
-            <a:avLst/>
-          </a:prstGeom>
-          <a:solidFill>
-            <a:srgbClr val="913B3E"/>
-          </a:solidFill>
-          <a:ln>
-            <a:noFill/>
-          </a:ln>
-        </p:spPr>
-        <p:txBody>
-          <a:bodyPr rtlCol="0" anchor="ctr"/>
-          <a:lstStyle/>
-          <a:p>
-            <a:pPr algn="ctr"/>
-          </a:p>
-        </p:txBody>
-      </p:sp>
-      <p:sp>
-        <p:nvSpPr>
           <p:cNvPr id="2" name="Title 1"/>
           <p:cNvSpPr>
             <a:spLocks noGrp="1"/>
@@ -5740,7 +5257,7 @@
       </p:sp>
       <p:sp>
         <p:nvSpPr>
-          <p:cNvPr id="7" name="사진 자리"/>
+          <p:cNvPr id="4" name="사진 자리"/>
           <p:cNvSpPr/>
           <p:nvPr/>
         </p:nvSpPr>
@@ -5788,7 +5305,7 @@
       </p:sp>
       <p:sp>
         <p:nvSpPr>
-          <p:cNvPr id="8" name="사진 자리"/>
+          <p:cNvPr id="5" name="사진 자리"/>
           <p:cNvSpPr/>
           <p:nvPr/>
         </p:nvSpPr>
@@ -5836,7 +5353,7 @@
       </p:sp>
       <p:sp>
         <p:nvSpPr>
-          <p:cNvPr id="9" name="사진 자리"/>
+          <p:cNvPr id="6" name="사진 자리"/>
           <p:cNvSpPr/>
           <p:nvPr/>
         </p:nvSpPr>
@@ -5884,7 +5401,7 @@
       </p:sp>
       <p:sp>
         <p:nvSpPr>
-          <p:cNvPr id="10" name="사진 자리"/>
+          <p:cNvPr id="7" name="사진 자리"/>
           <p:cNvSpPr/>
           <p:nvPr/>
         </p:nvSpPr>
@@ -5932,7 +5449,7 @@
       </p:sp>
       <p:sp>
         <p:nvSpPr>
-          <p:cNvPr id="11" name="사진 자리"/>
+          <p:cNvPr id="8" name="사진 자리"/>
           <p:cNvSpPr/>
           <p:nvPr/>
         </p:nvSpPr>
@@ -5980,7 +5497,7 @@
       </p:sp>
       <p:sp>
         <p:nvSpPr>
-          <p:cNvPr id="12" name="사진 자리"/>
+          <p:cNvPr id="9" name="사진 자리"/>
           <p:cNvSpPr/>
           <p:nvPr/>
         </p:nvSpPr>
@@ -6028,7 +5545,7 @@
       </p:sp>
       <p:sp>
         <p:nvSpPr>
-          <p:cNvPr id="13" name="사진 자리"/>
+          <p:cNvPr id="10" name="사진 자리"/>
           <p:cNvSpPr/>
           <p:nvPr/>
         </p:nvSpPr>
@@ -6076,7 +5593,7 @@
       </p:sp>
       <p:sp>
         <p:nvSpPr>
-          <p:cNvPr id="14" name="사진 자리"/>
+          <p:cNvPr id="11" name="사진 자리"/>
           <p:cNvSpPr/>
           <p:nvPr/>
         </p:nvSpPr>
@@ -6133,14 +5650,6 @@
 <file path=ppt/slides/slide6.xml><?xml version="1.0" encoding="utf-8"?>
 <p:sld xmlns:a="http://schemas.openxmlformats.org/drawingml/2006/main" xmlns:p="http://schemas.openxmlformats.org/presentationml/2006/main" xmlns:r="http://schemas.openxmlformats.org/officeDocument/2006/relationships">
   <p:cSld>
-    <p:bg>
-      <p:bgPr>
-        <a:solidFill>
-          <a:srgbClr val="EFF5FA"/>
-        </a:solidFill>
-        <a:effectLst/>
-      </p:bgPr>
-    </p:bg>
     <p:spTree>
       <p:nvGrpSpPr>
         <p:cNvPr id="1" name=""/>
@@ -6148,157 +5657,30 @@
         <p:nvPr/>
       </p:nvGrpSpPr>
       <p:grpSpPr/>
-      <p:sp>
-        <p:nvSpPr>
-          <p:cNvPr id="3" name="장식"/>
-          <p:cNvSpPr/>
+      <p:pic>
+        <p:nvPicPr>
+          <p:cNvPr id="3" name="표지 그림" descr="birthday-22.jpg"/>
+          <p:cNvPicPr>
+            <a:picLocks noChangeAspect="1"/>
+          </p:cNvPicPr>
           <p:nvPr/>
-        </p:nvSpPr>
-        <p:spPr>
-          <a:xfrm>
-            <a:off x="7315017" y="960120"/>
-            <a:ext cx="3657508" cy="5897880"/>
-          </a:xfrm>
-          <a:prstGeom prst="round2SameRect">
-            <a:avLst>
-              <a:gd name="adj1" fmla="val 50000"/>
-              <a:gd name="adj2" fmla="val 0"/>
-            </a:avLst>
-          </a:prstGeom>
-          <a:solidFill>
-            <a:srgbClr val="CEE2F3"/>
-          </a:solidFill>
-          <a:ln>
-            <a:noFill/>
-          </a:ln>
-        </p:spPr>
-        <p:txBody>
-          <a:bodyPr rtlCol="0" anchor="ctr"/>
-          <a:lstStyle/>
-          <a:p>
-            <a:pPr algn="ctr"/>
-          </a:p>
-        </p:txBody>
-      </p:sp>
-      <p:sp>
-        <p:nvSpPr>
-          <p:cNvPr id="4" name="장식"/>
-          <p:cNvSpPr/>
-          <p:nvPr/>
-        </p:nvSpPr>
-        <p:spPr>
-          <a:xfrm>
-            <a:off x="7924601" y="1783080"/>
-            <a:ext cx="2438339" cy="5074920"/>
-          </a:xfrm>
-          <a:prstGeom prst="round2SameRect">
-            <a:avLst>
-              <a:gd name="adj1" fmla="val 50000"/>
-              <a:gd name="adj2" fmla="val 0"/>
-            </a:avLst>
-          </a:prstGeom>
-          <a:solidFill>
-            <a:srgbClr val="275A86"/>
-          </a:solidFill>
-          <a:ln>
-            <a:noFill/>
-          </a:ln>
-        </p:spPr>
-        <p:txBody>
-          <a:bodyPr rtlCol="0" anchor="ctr"/>
-          <a:lstStyle/>
-          <a:p>
-            <a:pPr algn="ctr"/>
-          </a:p>
-        </p:txBody>
-      </p:sp>
-      <p:sp>
-        <p:nvSpPr>
-          <p:cNvPr id="5" name="장식"/>
-          <p:cNvSpPr/>
-          <p:nvPr/>
-        </p:nvSpPr>
-        <p:spPr>
-          <a:xfrm>
-            <a:off x="8046518" y="3017533"/>
-            <a:ext cx="2194505" cy="548626"/>
-          </a:xfrm>
-          <a:prstGeom prst="wave">
+        </p:nvPicPr>
+        <p:blipFill>
+          <a:blip r:embed="rId2"/>
+          <a:stretch>
+            <a:fillRect/>
+          </a:stretch>
+        </p:blipFill>
+        <p:spPr>
+          <a:xfrm>
+            <a:off x="0" y="0"/>
+            <a:ext cx="12191695" cy="6858000"/>
+          </a:xfrm>
+          <a:prstGeom prst="rect">
             <a:avLst/>
           </a:prstGeom>
-          <a:solidFill>
-            <a:srgbClr val="CEE2F3"/>
-          </a:solidFill>
-          <a:ln>
-            <a:noFill/>
-          </a:ln>
-        </p:spPr>
-        <p:txBody>
-          <a:bodyPr rtlCol="0" anchor="ctr"/>
-          <a:lstStyle/>
-          <a:p>
-            <a:pPr algn="ctr"/>
-          </a:p>
-        </p:txBody>
-      </p:sp>
-      <p:sp>
-        <p:nvSpPr>
-          <p:cNvPr id="6" name="장식"/>
-          <p:cNvSpPr/>
-          <p:nvPr/>
-        </p:nvSpPr>
-        <p:spPr>
-          <a:xfrm>
-            <a:off x="8046518" y="3493009"/>
-            <a:ext cx="2194505" cy="548626"/>
-          </a:xfrm>
-          <a:prstGeom prst="wave">
-            <a:avLst/>
-          </a:prstGeom>
-          <a:solidFill>
-            <a:srgbClr val="FFFFFF"/>
-          </a:solidFill>
-          <a:ln>
-            <a:noFill/>
-          </a:ln>
-        </p:spPr>
-        <p:txBody>
-          <a:bodyPr rtlCol="0" anchor="ctr"/>
-          <a:lstStyle/>
-          <a:p>
-            <a:pPr algn="ctr"/>
-          </a:p>
-        </p:txBody>
-      </p:sp>
-      <p:sp>
-        <p:nvSpPr>
-          <p:cNvPr id="7" name="장식"/>
-          <p:cNvSpPr/>
-          <p:nvPr/>
-        </p:nvSpPr>
-        <p:spPr>
-          <a:xfrm>
-            <a:off x="8046518" y="3968485"/>
-            <a:ext cx="2194505" cy="548626"/>
-          </a:xfrm>
-          <a:prstGeom prst="wave">
-            <a:avLst/>
-          </a:prstGeom>
-          <a:solidFill>
-            <a:srgbClr val="913B3E"/>
-          </a:solidFill>
-          <a:ln>
-            <a:noFill/>
-          </a:ln>
-        </p:spPr>
-        <p:txBody>
-          <a:bodyPr rtlCol="0" anchor="ctr"/>
-          <a:lstStyle/>
-          <a:p>
-            <a:pPr algn="ctr"/>
-          </a:p>
-        </p:txBody>
-      </p:sp>
+        </p:spPr>
+      </p:pic>
       <p:sp>
         <p:nvSpPr>
           <p:cNvPr id="2" name="Title 1"/>
@@ -6332,21 +5714,21 @@
                   <a:srgbClr val="122A3F"/>
                 </a:solidFill>
               </a:rPr>
-              <a:t>함께해 주셔서 감사합니다</a:t>
-            </a:r>
-          </a:p>
-        </p:txBody>
-      </p:sp>
-      <p:sp>
-        <p:nvSpPr>
-          <p:cNvPr id="8" name="한 줄 문구"/>
+              <a:t>와 주셔서 고맙습니다</a:t>
+            </a:r>
+          </a:p>
+        </p:txBody>
+      </p:sp>
+      <p:sp>
+        <p:nvSpPr>
+          <p:cNvPr id="4" name="한 줄 문구"/>
           <p:cNvSpPr txBox="1"/>
           <p:nvPr/>
         </p:nvSpPr>
         <p:spPr>
           <a:xfrm>
-            <a:off x="853418" y="3703320"/>
-            <a:ext cx="5852013" cy="822960"/>
+            <a:off x="853418" y="3749039"/>
+            <a:ext cx="6095847" cy="822960"/>
           </a:xfrm>
           <a:prstGeom prst="rect">
             <a:avLst/>
@@ -6370,21 +5752,21 @@
                   <a:srgbClr val="122A3F"/>
                 </a:solidFill>
               </a:rPr>
-              <a:t>첫 번째 생일을 축하해 주셔서 고맙습니다</a:t>
-            </a:r>
-          </a:p>
-        </p:txBody>
-      </p:sp>
-      <p:sp>
-        <p:nvSpPr>
-          <p:cNvPr id="9" name="안내 문구"/>
+              <a:t>아이가 한 살이 되었습니다</a:t>
+            </a:r>
+          </a:p>
+        </p:txBody>
+      </p:sp>
+      <p:sp>
+        <p:nvSpPr>
+          <p:cNvPr id="5" name="안내 문구"/>
           <p:cNvSpPr txBox="1"/>
           <p:nvPr/>
         </p:nvSpPr>
         <p:spPr>
           <a:xfrm>
-            <a:off x="853418" y="4572000"/>
-            <a:ext cx="5852013" cy="914400"/>
+            <a:off x="853418" y="4617720"/>
+            <a:ext cx="6095847" cy="914400"/>
           </a:xfrm>
           <a:prstGeom prst="rect">
             <a:avLst/>

--- a/public/fun/pack/pptx/birthday/돌잔치_22_돌잡이중심_섬마을선착장.pptx
+++ b/public/fun/pack/pptx/birthday/돌잔치_22_돌잡이중심_섬마을선착장.pptx
@@ -3347,7 +3347,7 @@
             <a:r>
               <a:rPr sz="4000" b="1" i="0">
                 <a:solidFill>
-                  <a:srgbClr val="122A3F"/>
+                  <a:srgbClr val="113B5F"/>
                 </a:solidFill>
               </a:rPr>
               <a:t>첫 번째 생일</a:t>
@@ -3385,7 +3385,7 @@
             <a:r>
               <a:rPr sz="1700" b="0" i="1">
                 <a:solidFill>
-                  <a:srgbClr val="122A3F"/>
+                  <a:srgbClr val="113B5F"/>
                 </a:solidFill>
               </a:rPr>
               <a:t>돈을 잡았으면 좋겠다고 할머니가 말씀하셨습니다</a:t>
@@ -3460,7 +3460,7 @@
     <p:bg>
       <p:bgPr>
         <a:solidFill>
-          <a:srgbClr val="EFF5FA"/>
+          <a:srgbClr val="EEF5FC"/>
         </a:solidFill>
         <a:effectLst/>
       </p:bgPr>
@@ -3490,7 +3490,7 @@
             </a:avLst>
           </a:prstGeom>
           <a:solidFill>
-            <a:srgbClr val="CEE2F3"/>
+            <a:srgbClr val="D1E7FA"/>
           </a:solidFill>
           <a:ln>
             <a:noFill/>
@@ -3534,7 +3534,7 @@
             <a:r>
               <a:rPr sz="3000" b="1" i="0">
                 <a:solidFill>
-                  <a:srgbClr val="122A3F"/>
+                  <a:srgbClr val="113B5F"/>
                 </a:solidFill>
               </a:rPr>
               <a:t>우리 아기를 소개합니다</a:t>
@@ -3559,11 +3559,11 @@
             </a:avLst>
           </a:prstGeom>
           <a:solidFill>
-            <a:srgbClr val="CEE2F3"/>
+            <a:srgbClr val="D1E7FA"/>
           </a:solidFill>
           <a:ln w="19050">
             <a:solidFill>
-              <a:srgbClr val="275A86"/>
+              <a:srgbClr val="267BC5"/>
             </a:solidFill>
             <a:prstDash val="dash"/>
           </a:ln>
@@ -3582,7 +3582,7 @@
             <a:r>
               <a:rPr sz="1400" b="0" i="0">
                 <a:solidFill>
-                  <a:srgbClr val="122A3F"/>
+                  <a:srgbClr val="113B5F"/>
                 </a:solidFill>
               </a:rPr>
               <a:t>아기 사진을 넣어 주세요</a:t>
@@ -3622,7 +3622,7 @@
                       <a:r>
                         <a:rPr sz="1500" b="1">
                           <a:solidFill>
-                            <a:srgbClr val="122A3F"/>
+                            <a:srgbClr val="113B5F"/>
                           </a:solidFill>
                         </a:rPr>
                         <a:t>이름</a:t>
@@ -3632,30 +3632,30 @@
                   <a:tcPr anchor="ctr" marL="73152" marR="73152">
                     <a:lnL w="9525" cap="flat" cmpd="sng" algn="ctr">
                       <a:solidFill>
-                        <a:srgbClr val="CEE2F3"/>
+                        <a:srgbClr val="D1E7FA"/>
                       </a:solidFill>
                       <a:prstDash val="solid"/>
                     </a:lnL>
                     <a:lnR w="9525" cap="flat" cmpd="sng" algn="ctr">
                       <a:solidFill>
-                        <a:srgbClr val="CEE2F3"/>
+                        <a:srgbClr val="D1E7FA"/>
                       </a:solidFill>
                       <a:prstDash val="solid"/>
                     </a:lnR>
                     <a:lnT w="9525" cap="flat" cmpd="sng" algn="ctr">
                       <a:solidFill>
-                        <a:srgbClr val="CEE2F3"/>
+                        <a:srgbClr val="D1E7FA"/>
                       </a:solidFill>
                       <a:prstDash val="solid"/>
                     </a:lnT>
                     <a:lnB w="9525" cap="flat" cmpd="sng" algn="ctr">
                       <a:solidFill>
-                        <a:srgbClr val="CEE2F3"/>
+                        <a:srgbClr val="D1E7FA"/>
                       </a:solidFill>
                       <a:prstDash val="solid"/>
                     </a:lnB>
                     <a:solidFill>
-                      <a:srgbClr val="CEE2F3"/>
+                      <a:srgbClr val="D1E7FA"/>
                     </a:solidFill>
                   </a:tcPr>
                 </a:tc>
@@ -3678,30 +3678,30 @@
                   <a:tcPr anchor="ctr" marL="73152" marR="73152">
                     <a:lnL w="9525" cap="flat" cmpd="sng" algn="ctr">
                       <a:solidFill>
-                        <a:srgbClr val="CEE2F3"/>
+                        <a:srgbClr val="D1E7FA"/>
                       </a:solidFill>
                       <a:prstDash val="solid"/>
                     </a:lnL>
                     <a:lnR w="9525" cap="flat" cmpd="sng" algn="ctr">
                       <a:solidFill>
-                        <a:srgbClr val="CEE2F3"/>
+                        <a:srgbClr val="D1E7FA"/>
                       </a:solidFill>
                       <a:prstDash val="solid"/>
                     </a:lnR>
                     <a:lnT w="9525" cap="flat" cmpd="sng" algn="ctr">
                       <a:solidFill>
-                        <a:srgbClr val="CEE2F3"/>
+                        <a:srgbClr val="D1E7FA"/>
                       </a:solidFill>
                       <a:prstDash val="solid"/>
                     </a:lnT>
                     <a:lnB w="9525" cap="flat" cmpd="sng" algn="ctr">
                       <a:solidFill>
-                        <a:srgbClr val="CEE2F3"/>
+                        <a:srgbClr val="D1E7FA"/>
                       </a:solidFill>
                       <a:prstDash val="solid"/>
                     </a:lnB>
                     <a:solidFill>
-                      <a:srgbClr val="EFF5FA"/>
+                      <a:srgbClr val="EEF5FC"/>
                     </a:solidFill>
                   </a:tcPr>
                 </a:tc>
@@ -3716,7 +3716,7 @@
                       <a:r>
                         <a:rPr sz="1500" b="1">
                           <a:solidFill>
-                            <a:srgbClr val="122A3F"/>
+                            <a:srgbClr val="113B5F"/>
                           </a:solidFill>
                         </a:rPr>
                         <a:t>생일</a:t>
@@ -3726,30 +3726,30 @@
                   <a:tcPr anchor="ctr" marL="73152" marR="73152">
                     <a:lnL w="9525" cap="flat" cmpd="sng" algn="ctr">
                       <a:solidFill>
-                        <a:srgbClr val="CEE2F3"/>
+                        <a:srgbClr val="D1E7FA"/>
                       </a:solidFill>
                       <a:prstDash val="solid"/>
                     </a:lnL>
                     <a:lnR w="9525" cap="flat" cmpd="sng" algn="ctr">
                       <a:solidFill>
-                        <a:srgbClr val="CEE2F3"/>
+                        <a:srgbClr val="D1E7FA"/>
                       </a:solidFill>
                       <a:prstDash val="solid"/>
                     </a:lnR>
                     <a:lnT w="9525" cap="flat" cmpd="sng" algn="ctr">
                       <a:solidFill>
-                        <a:srgbClr val="CEE2F3"/>
+                        <a:srgbClr val="D1E7FA"/>
                       </a:solidFill>
                       <a:prstDash val="solid"/>
                     </a:lnT>
                     <a:lnB w="9525" cap="flat" cmpd="sng" algn="ctr">
                       <a:solidFill>
-                        <a:srgbClr val="CEE2F3"/>
+                        <a:srgbClr val="D1E7FA"/>
                       </a:solidFill>
                       <a:prstDash val="solid"/>
                     </a:lnB>
                     <a:solidFill>
-                      <a:srgbClr val="CEE2F3"/>
+                      <a:srgbClr val="D1E7FA"/>
                     </a:solidFill>
                   </a:tcPr>
                 </a:tc>
@@ -3772,25 +3772,25 @@
                   <a:tcPr anchor="ctr" marL="73152" marR="73152">
                     <a:lnL w="9525" cap="flat" cmpd="sng" algn="ctr">
                       <a:solidFill>
-                        <a:srgbClr val="CEE2F3"/>
+                        <a:srgbClr val="D1E7FA"/>
                       </a:solidFill>
                       <a:prstDash val="solid"/>
                     </a:lnL>
                     <a:lnR w="9525" cap="flat" cmpd="sng" algn="ctr">
                       <a:solidFill>
-                        <a:srgbClr val="CEE2F3"/>
+                        <a:srgbClr val="D1E7FA"/>
                       </a:solidFill>
                       <a:prstDash val="solid"/>
                     </a:lnR>
                     <a:lnT w="9525" cap="flat" cmpd="sng" algn="ctr">
                       <a:solidFill>
-                        <a:srgbClr val="CEE2F3"/>
+                        <a:srgbClr val="D1E7FA"/>
                       </a:solidFill>
                       <a:prstDash val="solid"/>
                     </a:lnT>
                     <a:lnB w="9525" cap="flat" cmpd="sng" algn="ctr">
                       <a:solidFill>
-                        <a:srgbClr val="CEE2F3"/>
+                        <a:srgbClr val="D1E7FA"/>
                       </a:solidFill>
                       <a:prstDash val="solid"/>
                     </a:lnB>
@@ -3810,7 +3810,7 @@
                       <a:r>
                         <a:rPr sz="1500" b="1">
                           <a:solidFill>
-                            <a:srgbClr val="122A3F"/>
+                            <a:srgbClr val="113B5F"/>
                           </a:solidFill>
                         </a:rPr>
                         <a:t>키 · 몸무게</a:t>
@@ -3820,30 +3820,30 @@
                   <a:tcPr anchor="ctr" marL="73152" marR="73152">
                     <a:lnL w="9525" cap="flat" cmpd="sng" algn="ctr">
                       <a:solidFill>
-                        <a:srgbClr val="CEE2F3"/>
+                        <a:srgbClr val="D1E7FA"/>
                       </a:solidFill>
                       <a:prstDash val="solid"/>
                     </a:lnL>
                     <a:lnR w="9525" cap="flat" cmpd="sng" algn="ctr">
                       <a:solidFill>
-                        <a:srgbClr val="CEE2F3"/>
+                        <a:srgbClr val="D1E7FA"/>
                       </a:solidFill>
                       <a:prstDash val="solid"/>
                     </a:lnR>
                     <a:lnT w="9525" cap="flat" cmpd="sng" algn="ctr">
                       <a:solidFill>
-                        <a:srgbClr val="CEE2F3"/>
+                        <a:srgbClr val="D1E7FA"/>
                       </a:solidFill>
                       <a:prstDash val="solid"/>
                     </a:lnT>
                     <a:lnB w="9525" cap="flat" cmpd="sng" algn="ctr">
                       <a:solidFill>
-                        <a:srgbClr val="CEE2F3"/>
+                        <a:srgbClr val="D1E7FA"/>
                       </a:solidFill>
                       <a:prstDash val="solid"/>
                     </a:lnB>
                     <a:solidFill>
-                      <a:srgbClr val="CEE2F3"/>
+                      <a:srgbClr val="D1E7FA"/>
                     </a:solidFill>
                   </a:tcPr>
                 </a:tc>
@@ -3866,30 +3866,30 @@
                   <a:tcPr anchor="ctr" marL="73152" marR="73152">
                     <a:lnL w="9525" cap="flat" cmpd="sng" algn="ctr">
                       <a:solidFill>
-                        <a:srgbClr val="CEE2F3"/>
+                        <a:srgbClr val="D1E7FA"/>
                       </a:solidFill>
                       <a:prstDash val="solid"/>
                     </a:lnL>
                     <a:lnR w="9525" cap="flat" cmpd="sng" algn="ctr">
                       <a:solidFill>
-                        <a:srgbClr val="CEE2F3"/>
+                        <a:srgbClr val="D1E7FA"/>
                       </a:solidFill>
                       <a:prstDash val="solid"/>
                     </a:lnR>
                     <a:lnT w="9525" cap="flat" cmpd="sng" algn="ctr">
                       <a:solidFill>
-                        <a:srgbClr val="CEE2F3"/>
+                        <a:srgbClr val="D1E7FA"/>
                       </a:solidFill>
                       <a:prstDash val="solid"/>
                     </a:lnT>
                     <a:lnB w="9525" cap="flat" cmpd="sng" algn="ctr">
                       <a:solidFill>
-                        <a:srgbClr val="CEE2F3"/>
+                        <a:srgbClr val="D1E7FA"/>
                       </a:solidFill>
                       <a:prstDash val="solid"/>
                     </a:lnB>
                     <a:solidFill>
-                      <a:srgbClr val="EFF5FA"/>
+                      <a:srgbClr val="EEF5FC"/>
                     </a:solidFill>
                   </a:tcPr>
                 </a:tc>
@@ -3904,7 +3904,7 @@
                       <a:r>
                         <a:rPr sz="1500" b="1">
                           <a:solidFill>
-                            <a:srgbClr val="122A3F"/>
+                            <a:srgbClr val="113B5F"/>
                           </a:solidFill>
                         </a:rPr>
                         <a:t>좋아하는 것</a:t>
@@ -3914,30 +3914,30 @@
                   <a:tcPr anchor="ctr" marL="73152" marR="73152">
                     <a:lnL w="9525" cap="flat" cmpd="sng" algn="ctr">
                       <a:solidFill>
-                        <a:srgbClr val="CEE2F3"/>
+                        <a:srgbClr val="D1E7FA"/>
                       </a:solidFill>
                       <a:prstDash val="solid"/>
                     </a:lnL>
                     <a:lnR w="9525" cap="flat" cmpd="sng" algn="ctr">
                       <a:solidFill>
-                        <a:srgbClr val="CEE2F3"/>
+                        <a:srgbClr val="D1E7FA"/>
                       </a:solidFill>
                       <a:prstDash val="solid"/>
                     </a:lnR>
                     <a:lnT w="9525" cap="flat" cmpd="sng" algn="ctr">
                       <a:solidFill>
-                        <a:srgbClr val="CEE2F3"/>
+                        <a:srgbClr val="D1E7FA"/>
                       </a:solidFill>
                       <a:prstDash val="solid"/>
                     </a:lnT>
                     <a:lnB w="9525" cap="flat" cmpd="sng" algn="ctr">
                       <a:solidFill>
-                        <a:srgbClr val="CEE2F3"/>
+                        <a:srgbClr val="D1E7FA"/>
                       </a:solidFill>
                       <a:prstDash val="solid"/>
                     </a:lnB>
                     <a:solidFill>
-                      <a:srgbClr val="CEE2F3"/>
+                      <a:srgbClr val="D1E7FA"/>
                     </a:solidFill>
                   </a:tcPr>
                 </a:tc>
@@ -3960,25 +3960,25 @@
                   <a:tcPr anchor="ctr" marL="73152" marR="73152">
                     <a:lnL w="9525" cap="flat" cmpd="sng" algn="ctr">
                       <a:solidFill>
-                        <a:srgbClr val="CEE2F3"/>
+                        <a:srgbClr val="D1E7FA"/>
                       </a:solidFill>
                       <a:prstDash val="solid"/>
                     </a:lnL>
                     <a:lnR w="9525" cap="flat" cmpd="sng" algn="ctr">
                       <a:solidFill>
-                        <a:srgbClr val="CEE2F3"/>
+                        <a:srgbClr val="D1E7FA"/>
                       </a:solidFill>
                       <a:prstDash val="solid"/>
                     </a:lnR>
                     <a:lnT w="9525" cap="flat" cmpd="sng" algn="ctr">
                       <a:solidFill>
-                        <a:srgbClr val="CEE2F3"/>
+                        <a:srgbClr val="D1E7FA"/>
                       </a:solidFill>
                       <a:prstDash val="solid"/>
                     </a:lnT>
                     <a:lnB w="9525" cap="flat" cmpd="sng" algn="ctr">
                       <a:solidFill>
-                        <a:srgbClr val="CEE2F3"/>
+                        <a:srgbClr val="D1E7FA"/>
                       </a:solidFill>
                       <a:prstDash val="solid"/>
                     </a:lnB>
@@ -3998,7 +3998,7 @@
                       <a:r>
                         <a:rPr sz="1500" b="1">
                           <a:solidFill>
-                            <a:srgbClr val="122A3F"/>
+                            <a:srgbClr val="113B5F"/>
                           </a:solidFill>
                         </a:rPr>
                         <a:t>별명</a:t>
@@ -4008,30 +4008,30 @@
                   <a:tcPr anchor="ctr" marL="73152" marR="73152">
                     <a:lnL w="9525" cap="flat" cmpd="sng" algn="ctr">
                       <a:solidFill>
-                        <a:srgbClr val="CEE2F3"/>
+                        <a:srgbClr val="D1E7FA"/>
                       </a:solidFill>
                       <a:prstDash val="solid"/>
                     </a:lnL>
                     <a:lnR w="9525" cap="flat" cmpd="sng" algn="ctr">
                       <a:solidFill>
-                        <a:srgbClr val="CEE2F3"/>
+                        <a:srgbClr val="D1E7FA"/>
                       </a:solidFill>
                       <a:prstDash val="solid"/>
                     </a:lnR>
                     <a:lnT w="9525" cap="flat" cmpd="sng" algn="ctr">
                       <a:solidFill>
-                        <a:srgbClr val="CEE2F3"/>
+                        <a:srgbClr val="D1E7FA"/>
                       </a:solidFill>
                       <a:prstDash val="solid"/>
                     </a:lnT>
                     <a:lnB w="9525" cap="flat" cmpd="sng" algn="ctr">
                       <a:solidFill>
-                        <a:srgbClr val="CEE2F3"/>
+                        <a:srgbClr val="D1E7FA"/>
                       </a:solidFill>
                       <a:prstDash val="solid"/>
                     </a:lnB>
                     <a:solidFill>
-                      <a:srgbClr val="CEE2F3"/>
+                      <a:srgbClr val="D1E7FA"/>
                     </a:solidFill>
                   </a:tcPr>
                 </a:tc>
@@ -4054,30 +4054,30 @@
                   <a:tcPr anchor="ctr" marL="73152" marR="73152">
                     <a:lnL w="9525" cap="flat" cmpd="sng" algn="ctr">
                       <a:solidFill>
-                        <a:srgbClr val="CEE2F3"/>
+                        <a:srgbClr val="D1E7FA"/>
                       </a:solidFill>
                       <a:prstDash val="solid"/>
                     </a:lnL>
                     <a:lnR w="9525" cap="flat" cmpd="sng" algn="ctr">
                       <a:solidFill>
-                        <a:srgbClr val="CEE2F3"/>
+                        <a:srgbClr val="D1E7FA"/>
                       </a:solidFill>
                       <a:prstDash val="solid"/>
                     </a:lnR>
                     <a:lnT w="9525" cap="flat" cmpd="sng" algn="ctr">
                       <a:solidFill>
-                        <a:srgbClr val="CEE2F3"/>
+                        <a:srgbClr val="D1E7FA"/>
                       </a:solidFill>
                       <a:prstDash val="solid"/>
                     </a:lnT>
                     <a:lnB w="9525" cap="flat" cmpd="sng" algn="ctr">
                       <a:solidFill>
-                        <a:srgbClr val="CEE2F3"/>
+                        <a:srgbClr val="D1E7FA"/>
                       </a:solidFill>
                       <a:prstDash val="solid"/>
                     </a:lnB>
                     <a:solidFill>
-                      <a:srgbClr val="EFF5FA"/>
+                      <a:srgbClr val="EEF5FC"/>
                     </a:solidFill>
                   </a:tcPr>
                 </a:tc>
@@ -4092,7 +4092,7 @@
                       <a:r>
                         <a:rPr sz="1500" b="1">
                           <a:solidFill>
-                            <a:srgbClr val="122A3F"/>
+                            <a:srgbClr val="113B5F"/>
                           </a:solidFill>
                         </a:rPr>
                         <a:t>부모의 마음</a:t>
@@ -4102,30 +4102,30 @@
                   <a:tcPr anchor="ctr" marL="73152" marR="73152">
                     <a:lnL w="9525" cap="flat" cmpd="sng" algn="ctr">
                       <a:solidFill>
-                        <a:srgbClr val="CEE2F3"/>
+                        <a:srgbClr val="D1E7FA"/>
                       </a:solidFill>
                       <a:prstDash val="solid"/>
                     </a:lnL>
                     <a:lnR w="9525" cap="flat" cmpd="sng" algn="ctr">
                       <a:solidFill>
-                        <a:srgbClr val="CEE2F3"/>
+                        <a:srgbClr val="D1E7FA"/>
                       </a:solidFill>
                       <a:prstDash val="solid"/>
                     </a:lnR>
                     <a:lnT w="9525" cap="flat" cmpd="sng" algn="ctr">
                       <a:solidFill>
-                        <a:srgbClr val="CEE2F3"/>
+                        <a:srgbClr val="D1E7FA"/>
                       </a:solidFill>
                       <a:prstDash val="solid"/>
                     </a:lnT>
                     <a:lnB w="9525" cap="flat" cmpd="sng" algn="ctr">
                       <a:solidFill>
-                        <a:srgbClr val="CEE2F3"/>
+                        <a:srgbClr val="D1E7FA"/>
                       </a:solidFill>
                       <a:prstDash val="solid"/>
                     </a:lnB>
                     <a:solidFill>
-                      <a:srgbClr val="CEE2F3"/>
+                      <a:srgbClr val="D1E7FA"/>
                     </a:solidFill>
                   </a:tcPr>
                 </a:tc>
@@ -4148,25 +4148,25 @@
                   <a:tcPr anchor="ctr" marL="73152" marR="73152">
                     <a:lnL w="9525" cap="flat" cmpd="sng" algn="ctr">
                       <a:solidFill>
-                        <a:srgbClr val="CEE2F3"/>
+                        <a:srgbClr val="D1E7FA"/>
                       </a:solidFill>
                       <a:prstDash val="solid"/>
                     </a:lnL>
                     <a:lnR w="9525" cap="flat" cmpd="sng" algn="ctr">
                       <a:solidFill>
-                        <a:srgbClr val="CEE2F3"/>
+                        <a:srgbClr val="D1E7FA"/>
                       </a:solidFill>
                       <a:prstDash val="solid"/>
                     </a:lnR>
                     <a:lnT w="9525" cap="flat" cmpd="sng" algn="ctr">
                       <a:solidFill>
-                        <a:srgbClr val="CEE2F3"/>
+                        <a:srgbClr val="D1E7FA"/>
                       </a:solidFill>
                       <a:prstDash val="solid"/>
                     </a:lnT>
                     <a:lnB w="9525" cap="flat" cmpd="sng" algn="ctr">
                       <a:solidFill>
-                        <a:srgbClr val="CEE2F3"/>
+                        <a:srgbClr val="D1E7FA"/>
                       </a:solidFill>
                       <a:prstDash val="solid"/>
                     </a:lnB>
@@ -4194,7 +4194,7 @@
     <p:bg>
       <p:bgPr>
         <a:solidFill>
-          <a:srgbClr val="EFF5FA"/>
+          <a:srgbClr val="EEF5FC"/>
         </a:solidFill>
         <a:effectLst/>
       </p:bgPr>
@@ -4224,7 +4224,7 @@
             </a:avLst>
           </a:prstGeom>
           <a:solidFill>
-            <a:srgbClr val="CEE2F3"/>
+            <a:srgbClr val="D1E7FA"/>
           </a:solidFill>
           <a:ln>
             <a:noFill/>
@@ -4268,7 +4268,7 @@
             <a:r>
               <a:rPr sz="3000" b="1" i="0">
                 <a:solidFill>
-                  <a:srgbClr val="122A3F"/>
+                  <a:srgbClr val="113B5F"/>
                 </a:solidFill>
               </a:rPr>
               <a:t>돌잡이 이야기</a:t>
@@ -4293,11 +4293,11 @@
             </a:avLst>
           </a:prstGeom>
           <a:solidFill>
-            <a:srgbClr val="EFF5FA"/>
+            <a:srgbClr val="EEF5FC"/>
           </a:solidFill>
           <a:ln w="15875">
             <a:solidFill>
-              <a:srgbClr val="CEE2F3"/>
+              <a:srgbClr val="D1E7FA"/>
             </a:solidFill>
           </a:ln>
         </p:spPr>
@@ -4324,7 +4324,7 @@
             <a:avLst/>
           </a:prstGeom>
           <a:solidFill>
-            <a:srgbClr val="275A86"/>
+            <a:srgbClr val="267BC5"/>
           </a:solidFill>
           <a:ln>
             <a:noFill/>
@@ -4382,7 +4382,7 @@
             <a:r>
               <a:rPr sz="1600" b="1" i="0">
                 <a:solidFill>
-                  <a:srgbClr val="122A3F"/>
+                  <a:srgbClr val="113B5F"/>
                 </a:solidFill>
               </a:rPr>
               <a:t>연필 · 공부</a:t>
@@ -4445,11 +4445,11 @@
             </a:avLst>
           </a:prstGeom>
           <a:solidFill>
-            <a:srgbClr val="EFF5FA"/>
+            <a:srgbClr val="EEF5FC"/>
           </a:solidFill>
           <a:ln w="15875">
             <a:solidFill>
-              <a:srgbClr val="CEE2F3"/>
+              <a:srgbClr val="D1E7FA"/>
             </a:solidFill>
           </a:ln>
         </p:spPr>
@@ -4476,7 +4476,7 @@
             <a:avLst/>
           </a:prstGeom>
           <a:solidFill>
-            <a:srgbClr val="275A86"/>
+            <a:srgbClr val="267BC5"/>
           </a:solidFill>
           <a:ln>
             <a:noFill/>
@@ -4534,7 +4534,7 @@
             <a:r>
               <a:rPr sz="1600" b="1" i="0">
                 <a:solidFill>
-                  <a:srgbClr val="122A3F"/>
+                  <a:srgbClr val="113B5F"/>
                 </a:solidFill>
               </a:rPr>
               <a:t>실 · 장수</a:t>
@@ -4597,11 +4597,11 @@
             </a:avLst>
           </a:prstGeom>
           <a:solidFill>
-            <a:srgbClr val="EFF5FA"/>
+            <a:srgbClr val="EEF5FC"/>
           </a:solidFill>
           <a:ln w="15875">
             <a:solidFill>
-              <a:srgbClr val="CEE2F3"/>
+              <a:srgbClr val="D1E7FA"/>
             </a:solidFill>
           </a:ln>
         </p:spPr>
@@ -4628,7 +4628,7 @@
             <a:avLst/>
           </a:prstGeom>
           <a:solidFill>
-            <a:srgbClr val="275A86"/>
+            <a:srgbClr val="267BC5"/>
           </a:solidFill>
           <a:ln>
             <a:noFill/>
@@ -4686,7 +4686,7 @@
             <a:r>
               <a:rPr sz="1600" b="1" i="0">
                 <a:solidFill>
-                  <a:srgbClr val="122A3F"/>
+                  <a:srgbClr val="113B5F"/>
                 </a:solidFill>
               </a:rPr>
               <a:t>돈 · 부</a:t>
@@ -4749,11 +4749,11 @@
             </a:avLst>
           </a:prstGeom>
           <a:solidFill>
-            <a:srgbClr val="EFF5FA"/>
+            <a:srgbClr val="EEF5FC"/>
           </a:solidFill>
           <a:ln w="15875">
             <a:solidFill>
-              <a:srgbClr val="CEE2F3"/>
+              <a:srgbClr val="D1E7FA"/>
             </a:solidFill>
           </a:ln>
         </p:spPr>
@@ -4780,7 +4780,7 @@
             <a:avLst/>
           </a:prstGeom>
           <a:solidFill>
-            <a:srgbClr val="275A86"/>
+            <a:srgbClr val="267BC5"/>
           </a:solidFill>
           <a:ln>
             <a:noFill/>
@@ -4838,7 +4838,7 @@
             <a:r>
               <a:rPr sz="1600" b="1" i="0">
                 <a:solidFill>
-                  <a:srgbClr val="122A3F"/>
+                  <a:srgbClr val="113B5F"/>
                 </a:solidFill>
               </a:rPr>
               <a:t>마이크 · 인기</a:t>
@@ -4898,7 +4898,7 @@
     <p:bg>
       <p:bgPr>
         <a:solidFill>
-          <a:srgbClr val="EFF5FA"/>
+          <a:srgbClr val="EEF5FC"/>
         </a:solidFill>
         <a:effectLst/>
       </p:bgPr>
@@ -4928,7 +4928,7 @@
             </a:avLst>
           </a:prstGeom>
           <a:solidFill>
-            <a:srgbClr val="CEE2F3"/>
+            <a:srgbClr val="D1E7FA"/>
           </a:solidFill>
           <a:ln>
             <a:noFill/>
@@ -4972,7 +4972,7 @@
             <a:r>
               <a:rPr sz="3000" b="1" i="0">
                 <a:solidFill>
-                  <a:srgbClr val="122A3F"/>
+                  <a:srgbClr val="113B5F"/>
                 </a:solidFill>
               </a:rPr>
               <a:t>우리 아기의 선택은?</a:t>
@@ -4997,11 +4997,11 @@
             </a:avLst>
           </a:prstGeom>
           <a:solidFill>
-            <a:srgbClr val="CEE2F3"/>
+            <a:srgbClr val="D1E7FA"/>
           </a:solidFill>
           <a:ln w="19050">
             <a:solidFill>
-              <a:srgbClr val="275A86"/>
+              <a:srgbClr val="267BC5"/>
             </a:solidFill>
             <a:prstDash val="dash"/>
           </a:ln>
@@ -5020,7 +5020,7 @@
             <a:r>
               <a:rPr sz="1400" b="0" i="0">
                 <a:solidFill>
-                  <a:srgbClr val="122A3F"/>
+                  <a:srgbClr val="113B5F"/>
                 </a:solidFill>
               </a:rPr>
               <a:t>돌잡이 사진</a:t>
@@ -5045,11 +5045,11 @@
             </a:avLst>
           </a:prstGeom>
           <a:solidFill>
-            <a:srgbClr val="EFF5FA"/>
+            <a:srgbClr val="EEF5FC"/>
           </a:solidFill>
           <a:ln w="12700">
             <a:solidFill>
-              <a:srgbClr val="CEE2F3"/>
+              <a:srgbClr val="D1E7FA"/>
             </a:solidFill>
           </a:ln>
         </p:spPr>
@@ -5173,7 +5173,7 @@
     <p:bg>
       <p:bgPr>
         <a:solidFill>
-          <a:srgbClr val="EFF5FA"/>
+          <a:srgbClr val="EEF5FC"/>
         </a:solidFill>
         <a:effectLst/>
       </p:bgPr>
@@ -5203,7 +5203,7 @@
             </a:avLst>
           </a:prstGeom>
           <a:solidFill>
-            <a:srgbClr val="CEE2F3"/>
+            <a:srgbClr val="D1E7FA"/>
           </a:solidFill>
           <a:ln>
             <a:noFill/>
@@ -5247,7 +5247,7 @@
             <a:r>
               <a:rPr sz="3000" b="1" i="0">
                 <a:solidFill>
-                  <a:srgbClr val="122A3F"/>
+                  <a:srgbClr val="113B5F"/>
                 </a:solidFill>
               </a:rPr>
               <a:t>사진 모음</a:t>
@@ -5272,11 +5272,11 @@
             </a:avLst>
           </a:prstGeom>
           <a:solidFill>
-            <a:srgbClr val="CEE2F3"/>
+            <a:srgbClr val="D1E7FA"/>
           </a:solidFill>
           <a:ln w="19050">
             <a:solidFill>
-              <a:srgbClr val="275A86"/>
+              <a:srgbClr val="267BC5"/>
             </a:solidFill>
             <a:prstDash val="dash"/>
           </a:ln>
@@ -5295,7 +5295,7 @@
             <a:r>
               <a:rPr sz="1200" b="0" i="0">
                 <a:solidFill>
-                  <a:srgbClr val="122A3F"/>
+                  <a:srgbClr val="113B5F"/>
                 </a:solidFill>
               </a:rPr>
               <a:t>사진 1</a:t>
@@ -5320,11 +5320,11 @@
             </a:avLst>
           </a:prstGeom>
           <a:solidFill>
-            <a:srgbClr val="CEE2F3"/>
+            <a:srgbClr val="D1E7FA"/>
           </a:solidFill>
           <a:ln w="19050">
             <a:solidFill>
-              <a:srgbClr val="275A86"/>
+              <a:srgbClr val="267BC5"/>
             </a:solidFill>
             <a:prstDash val="dash"/>
           </a:ln>
@@ -5343,7 +5343,7 @@
             <a:r>
               <a:rPr sz="1200" b="0" i="0">
                 <a:solidFill>
-                  <a:srgbClr val="122A3F"/>
+                  <a:srgbClr val="113B5F"/>
                 </a:solidFill>
               </a:rPr>
               <a:t>사진 2</a:t>
@@ -5368,11 +5368,11 @@
             </a:avLst>
           </a:prstGeom>
           <a:solidFill>
-            <a:srgbClr val="CEE2F3"/>
+            <a:srgbClr val="D1E7FA"/>
           </a:solidFill>
           <a:ln w="19050">
             <a:solidFill>
-              <a:srgbClr val="275A86"/>
+              <a:srgbClr val="267BC5"/>
             </a:solidFill>
             <a:prstDash val="dash"/>
           </a:ln>
@@ -5391,7 +5391,7 @@
             <a:r>
               <a:rPr sz="1200" b="0" i="0">
                 <a:solidFill>
-                  <a:srgbClr val="122A3F"/>
+                  <a:srgbClr val="113B5F"/>
                 </a:solidFill>
               </a:rPr>
               <a:t>사진 3</a:t>
@@ -5416,11 +5416,11 @@
             </a:avLst>
           </a:prstGeom>
           <a:solidFill>
-            <a:srgbClr val="CEE2F3"/>
+            <a:srgbClr val="D1E7FA"/>
           </a:solidFill>
           <a:ln w="19050">
             <a:solidFill>
-              <a:srgbClr val="275A86"/>
+              <a:srgbClr val="267BC5"/>
             </a:solidFill>
             <a:prstDash val="dash"/>
           </a:ln>
@@ -5439,7 +5439,7 @@
             <a:r>
               <a:rPr sz="1200" b="0" i="0">
                 <a:solidFill>
-                  <a:srgbClr val="122A3F"/>
+                  <a:srgbClr val="113B5F"/>
                 </a:solidFill>
               </a:rPr>
               <a:t>사진 4</a:t>
@@ -5464,11 +5464,11 @@
             </a:avLst>
           </a:prstGeom>
           <a:solidFill>
-            <a:srgbClr val="CEE2F3"/>
+            <a:srgbClr val="D1E7FA"/>
           </a:solidFill>
           <a:ln w="19050">
             <a:solidFill>
-              <a:srgbClr val="275A86"/>
+              <a:srgbClr val="267BC5"/>
             </a:solidFill>
             <a:prstDash val="dash"/>
           </a:ln>
@@ -5487,7 +5487,7 @@
             <a:r>
               <a:rPr sz="1200" b="0" i="0">
                 <a:solidFill>
-                  <a:srgbClr val="122A3F"/>
+                  <a:srgbClr val="113B5F"/>
                 </a:solidFill>
               </a:rPr>
               <a:t>사진 5</a:t>
@@ -5512,11 +5512,11 @@
             </a:avLst>
           </a:prstGeom>
           <a:solidFill>
-            <a:srgbClr val="CEE2F3"/>
+            <a:srgbClr val="D1E7FA"/>
           </a:solidFill>
           <a:ln w="19050">
             <a:solidFill>
-              <a:srgbClr val="275A86"/>
+              <a:srgbClr val="267BC5"/>
             </a:solidFill>
             <a:prstDash val="dash"/>
           </a:ln>
@@ -5535,7 +5535,7 @@
             <a:r>
               <a:rPr sz="1200" b="0" i="0">
                 <a:solidFill>
-                  <a:srgbClr val="122A3F"/>
+                  <a:srgbClr val="113B5F"/>
                 </a:solidFill>
               </a:rPr>
               <a:t>사진 6</a:t>
@@ -5560,11 +5560,11 @@
             </a:avLst>
           </a:prstGeom>
           <a:solidFill>
-            <a:srgbClr val="CEE2F3"/>
+            <a:srgbClr val="D1E7FA"/>
           </a:solidFill>
           <a:ln w="19050">
             <a:solidFill>
-              <a:srgbClr val="275A86"/>
+              <a:srgbClr val="267BC5"/>
             </a:solidFill>
             <a:prstDash val="dash"/>
           </a:ln>
@@ -5583,7 +5583,7 @@
             <a:r>
               <a:rPr sz="1200" b="0" i="0">
                 <a:solidFill>
-                  <a:srgbClr val="122A3F"/>
+                  <a:srgbClr val="113B5F"/>
                 </a:solidFill>
               </a:rPr>
               <a:t>사진 7</a:t>
@@ -5608,11 +5608,11 @@
             </a:avLst>
           </a:prstGeom>
           <a:solidFill>
-            <a:srgbClr val="CEE2F3"/>
+            <a:srgbClr val="D1E7FA"/>
           </a:solidFill>
           <a:ln w="19050">
             <a:solidFill>
-              <a:srgbClr val="275A86"/>
+              <a:srgbClr val="267BC5"/>
             </a:solidFill>
             <a:prstDash val="dash"/>
           </a:ln>
@@ -5631,7 +5631,7 @@
             <a:r>
               <a:rPr sz="1200" b="0" i="0">
                 <a:solidFill>
-                  <a:srgbClr val="122A3F"/>
+                  <a:srgbClr val="113B5F"/>
                 </a:solidFill>
               </a:rPr>
               <a:t>사진 8</a:t>
@@ -5711,7 +5711,7 @@
             <a:r>
               <a:rPr sz="3400" b="1" i="0">
                 <a:solidFill>
-                  <a:srgbClr val="122A3F"/>
+                  <a:srgbClr val="113B5F"/>
                 </a:solidFill>
               </a:rPr>
               <a:t>와 주셔서 고맙습니다</a:t>
@@ -5749,7 +5749,7 @@
             <a:r>
               <a:rPr sz="1700" b="0" i="1">
                 <a:solidFill>
-                  <a:srgbClr val="122A3F"/>
+                  <a:srgbClr val="113B5F"/>
                 </a:solidFill>
               </a:rPr>
               <a:t>아이가 한 살이 되었습니다</a:t>
@@ -5814,34 +5814,34 @@
         <a:sysClr val="window" lastClr="FFFFFF"/>
       </a:lt1>
       <a:dk2>
-        <a:srgbClr val="122A3F"/>
+        <a:srgbClr val="113B5F"/>
       </a:dk2>
       <a:lt2>
-        <a:srgbClr val="EFF5FA"/>
+        <a:srgbClr val="EEF5FC"/>
       </a:lt2>
       <a:accent1>
-        <a:srgbClr val="275A86"/>
+        <a:srgbClr val="267BC5"/>
       </a:accent1>
       <a:accent2>
-        <a:srgbClr val="913B3E"/>
+        <a:srgbClr val="209DB6"/>
       </a:accent2>
       <a:accent3>
-        <a:srgbClr val="122A3F"/>
+        <a:srgbClr val="113B5F"/>
       </a:accent3>
       <a:accent4>
-        <a:srgbClr val="CEE2F3"/>
+        <a:srgbClr val="D1E7FA"/>
       </a:accent4>
       <a:accent5>
-        <a:srgbClr val="5C4A62"/>
+        <a:srgbClr val="238CBE"/>
       </a:accent5>
       <a:accent6>
-        <a:srgbClr val="717F8C"/>
+        <a:srgbClr val="70899F"/>
       </a:accent6>
       <a:hlink>
-        <a:srgbClr val="275A86"/>
+        <a:srgbClr val="267BC5"/>
       </a:hlink>
       <a:folHlink>
-        <a:srgbClr val="122A3F"/>
+        <a:srgbClr val="113B5F"/>
       </a:folHlink>
     </a:clrScheme>
     <a:fontScheme name="Office">

--- a/public/fun/pack/pptx/birthday/돌잔치_22_돌잡이중심_섬마을선착장.pptx
+++ b/public/fun/pack/pptx/birthday/돌잔치_22_돌잡이중심_섬마을선착장.pptx
@@ -3286,6 +3286,14 @@
 <file path=ppt/slides/slide1.xml><?xml version="1.0" encoding="utf-8"?>
 <p:sld xmlns:a="http://schemas.openxmlformats.org/drawingml/2006/main" xmlns:p="http://schemas.openxmlformats.org/presentationml/2006/main" xmlns:r="http://schemas.openxmlformats.org/officeDocument/2006/relationships">
   <p:cSld>
+    <p:bg>
+      <p:bgPr>
+        <a:solidFill>
+          <a:srgbClr val="EAF4FD"/>
+        </a:solidFill>
+        <a:effectLst/>
+      </p:bgPr>
+    </p:bg>
     <p:spTree>
       <p:nvGrpSpPr>
         <p:cNvPr id="1" name=""/>
@@ -3293,30 +3301,120 @@
         <p:nvPr/>
       </p:nvGrpSpPr>
       <p:grpSpPr/>
-      <p:pic>
-        <p:nvPicPr>
-          <p:cNvPr id="3" name="표지 그림" descr="birthday-22.jpg"/>
-          <p:cNvPicPr>
-            <a:picLocks noChangeAspect="1"/>
-          </p:cNvPicPr>
+      <p:sp>
+        <p:nvSpPr>
+          <p:cNvPr id="3" name="사진 자리"/>
+          <p:cNvSpPr/>
           <p:nvPr/>
-        </p:nvPicPr>
-        <p:blipFill>
-          <a:blip r:embed="rId2"/>
-          <a:stretch>
-            <a:fillRect/>
-          </a:stretch>
-        </p:blipFill>
-        <p:spPr>
-          <a:xfrm>
-            <a:off x="0" y="0"/>
-            <a:ext cx="12191695" cy="6858000"/>
+        </p:nvSpPr>
+        <p:spPr>
+          <a:xfrm>
+            <a:off x="1463003" y="960120"/>
+            <a:ext cx="3657508" cy="4526280"/>
+          </a:xfrm>
+          <a:prstGeom prst="roundRect">
+            <a:avLst>
+              <a:gd name="adj" fmla="val 4000"/>
+            </a:avLst>
+          </a:prstGeom>
+          <a:solidFill>
+            <a:srgbClr val="A5CFF3"/>
+          </a:solidFill>
+          <a:ln>
+            <a:noFill/>
+          </a:ln>
+        </p:spPr>
+        <p:txBody>
+          <a:bodyPr rtlCol="0" anchor="ctr" wrap="square" lIns="54864" rIns="54864" tIns="27432" bIns="27432">
+            <a:noAutofit/>
+          </a:bodyPr>
+          <a:lstStyle/>
+          <a:p>
+            <a:pPr algn="ctr">
+              <a:lnSpc>
+                <a:spcPct val="100000"/>
+              </a:lnSpc>
+            </a:pPr>
+            <a:r>
+              <a:rPr sz="1400" b="0" i="0">
+                <a:solidFill>
+                  <a:srgbClr val="273949"/>
+                </a:solidFill>
+              </a:rPr>
+              <a:t>사진을 넣어 주세요</a:t>
+            </a:r>
+          </a:p>
+        </p:txBody>
+      </p:sp>
+      <p:sp>
+        <p:nvSpPr>
+          <p:cNvPr id="4" name="장식"/>
+          <p:cNvSpPr/>
+          <p:nvPr/>
+        </p:nvSpPr>
+        <p:spPr>
+          <a:xfrm>
+            <a:off x="975335" y="1234439"/>
+            <a:ext cx="3657508" cy="4526280"/>
+          </a:xfrm>
+          <a:prstGeom prst="roundRect">
+            <a:avLst>
+              <a:gd name="adj" fmla="val 4000"/>
+            </a:avLst>
+          </a:prstGeom>
+          <a:noFill/>
+          <a:ln w="9525">
+            <a:solidFill>
+              <a:srgbClr val="26231F"/>
+            </a:solidFill>
+          </a:ln>
+        </p:spPr>
+        <p:txBody>
+          <a:bodyPr rtlCol="0" anchor="ctr"/>
+          <a:lstStyle/>
+          <a:p>
+            <a:pPr algn="ctr"/>
+          </a:p>
+        </p:txBody>
+      </p:sp>
+      <p:sp>
+        <p:nvSpPr>
+          <p:cNvPr id="5" name="라벨"/>
+          <p:cNvSpPr txBox="1"/>
+          <p:nvPr/>
+        </p:nvSpPr>
+        <p:spPr>
+          <a:xfrm>
+            <a:off x="6827349" y="2148840"/>
+            <a:ext cx="4632844" cy="274320"/>
           </a:xfrm>
           <a:prstGeom prst="rect">
             <a:avLst/>
           </a:prstGeom>
-        </p:spPr>
-      </p:pic>
+          <a:noFill/>
+        </p:spPr>
+        <p:txBody>
+          <a:bodyPr wrap="square" lIns="54864" rIns="54864" tIns="27432" bIns="27432" anchor="t">
+            <a:noAutofit/>
+          </a:bodyPr>
+          <a:lstStyle/>
+          <a:p>
+            <a:pPr algn="l">
+              <a:lnSpc>
+                <a:spcPct val="115000"/>
+              </a:lnSpc>
+            </a:pPr>
+            <a:r>
+              <a:rPr sz="1000" b="1" i="0" spc="250">
+                <a:solidFill>
+                  <a:srgbClr val="26231F"/>
+                </a:solidFill>
+              </a:rPr>
+              <a:t>FIRST BIRTHDAY</a:t>
+            </a:r>
+          </a:p>
+        </p:txBody>
+      </p:sp>
       <p:sp>
         <p:nvSpPr>
           <p:cNvPr id="2" name="Title 1"/>
@@ -3329,8 +3427,8 @@
         </p:nvSpPr>
         <p:spPr>
           <a:xfrm>
-            <a:off x="853418" y="2057400"/>
-            <a:ext cx="6095847" cy="1554480"/>
+            <a:off x="6827349" y="2606040"/>
+            <a:ext cx="4632844" cy="1188720"/>
           </a:xfrm>
         </p:spPr>
         <p:txBody>
@@ -3347,7 +3445,7 @@
             <a:r>
               <a:rPr sz="4000" b="1" i="0">
                 <a:solidFill>
-                  <a:srgbClr val="113B5F"/>
+                  <a:srgbClr val="26231F"/>
                 </a:solidFill>
               </a:rPr>
               <a:t>첫 번째 생일</a:t>
@@ -3357,14 +3455,14 @@
       </p:sp>
       <p:sp>
         <p:nvSpPr>
-          <p:cNvPr id="4" name="한 줄 문구"/>
+          <p:cNvPr id="6" name="한 줄 문구"/>
           <p:cNvSpPr txBox="1"/>
           <p:nvPr/>
         </p:nvSpPr>
         <p:spPr>
           <a:xfrm>
-            <a:off x="853418" y="3749039"/>
-            <a:ext cx="6095847" cy="822960"/>
+            <a:off x="6827349" y="3886200"/>
+            <a:ext cx="4632844" cy="822960"/>
           </a:xfrm>
           <a:prstGeom prst="rect">
             <a:avLst/>
@@ -3383,9 +3481,9 @@
               </a:lnSpc>
             </a:pPr>
             <a:r>
-              <a:rPr sz="1700" b="0" i="1">
-                <a:solidFill>
-                  <a:srgbClr val="113B5F"/>
+              <a:rPr sz="1700" b="0" i="0">
+                <a:solidFill>
+                  <a:srgbClr val="26231F"/>
                 </a:solidFill>
               </a:rPr>
               <a:t>돈을 잡았으면 좋겠다고 할머니가 말씀하셨습니다</a:t>
@@ -3395,14 +3493,14 @@
       </p:sp>
       <p:sp>
         <p:nvSpPr>
-          <p:cNvPr id="5" name="안내 문구"/>
+          <p:cNvPr id="7" name="안내 문구"/>
           <p:cNvSpPr txBox="1"/>
           <p:nvPr/>
         </p:nvSpPr>
         <p:spPr>
           <a:xfrm>
-            <a:off x="853418" y="4617720"/>
-            <a:ext cx="6095847" cy="914400"/>
+            <a:off x="6827349" y="4754880"/>
+            <a:ext cx="4632844" cy="914400"/>
           </a:xfrm>
           <a:prstGeom prst="rect">
             <a:avLst/>
@@ -3423,10 +3521,10 @@
             <a:r>
               <a:rPr sz="1400" b="0" i="0">
                 <a:solidFill>
-                  <a:srgbClr val="666666"/>
+                  <a:srgbClr val="26231F"/>
                 </a:solidFill>
               </a:rPr>
-              <a:t>아기 이름 · 2027. 00. 00</a:t>
+              <a:t>아기 이름 · 날짜 입력</a:t>
             </a:r>
           </a:p>
           <a:p>
@@ -3438,7 +3536,7 @@
             <a:r>
               <a:rPr sz="1400" b="0" i="0">
                 <a:solidFill>
-                  <a:srgbClr val="666666"/>
+                  <a:srgbClr val="26231F"/>
                 </a:solidFill>
               </a:rPr>
               <a:t>장소를 입력하세요</a:t>
@@ -3460,7 +3558,7 @@
     <p:bg>
       <p:bgPr>
         <a:solidFill>
-          <a:srgbClr val="EEF5FC"/>
+          <a:srgbClr val="FFFFFF"/>
         </a:solidFill>
         <a:effectLst/>
       </p:bgPr>
@@ -3479,18 +3577,15 @@
           <p:nvPr/>
         </p:nvSpPr>
         <p:spPr>
-          <a:xfrm rot="10800000">
-            <a:off x="10637215" y="0"/>
-            <a:ext cx="914400" cy="1554480"/>
-          </a:xfrm>
-          <a:prstGeom prst="round2SameRect">
-            <a:avLst>
-              <a:gd name="adj1" fmla="val 50000"/>
-              <a:gd name="adj2" fmla="val 0"/>
-            </a:avLst>
+          <a:xfrm>
+            <a:off x="640080" y="6400800"/>
+            <a:ext cx="10911535" cy="10972"/>
+          </a:xfrm>
+          <a:prstGeom prst="rect">
+            <a:avLst/>
           </a:prstGeom>
           <a:solidFill>
-            <a:srgbClr val="D1E7FA"/>
+            <a:srgbClr val="26231F"/>
           </a:solidFill>
           <a:ln>
             <a:noFill/>
@@ -3506,6 +3601,73 @@
       </p:sp>
       <p:sp>
         <p:nvSpPr>
+          <p:cNvPr id="4" name="하단 라벨"/>
+          <p:cNvSpPr txBox="1"/>
+          <p:nvPr/>
+        </p:nvSpPr>
+        <p:spPr>
+          <a:xfrm>
+            <a:off x="640080" y="6437376"/>
+            <a:ext cx="5486400" cy="274320"/>
+          </a:xfrm>
+          <a:prstGeom prst="rect">
+            <a:avLst/>
+          </a:prstGeom>
+          <a:noFill/>
+        </p:spPr>
+        <p:txBody>
+          <a:bodyPr wrap="square" lIns="54864" rIns="54864" tIns="27432" bIns="27432" anchor="ctr">
+            <a:noAutofit/>
+          </a:bodyPr>
+          <a:lstStyle/>
+          <a:p>
+            <a:pPr algn="l">
+              <a:lnSpc>
+                <a:spcPct val="115000"/>
+              </a:lnSpc>
+            </a:pPr>
+            <a:r>
+              <a:rPr sz="900" b="1" i="0" spc="250">
+                <a:solidFill>
+                  <a:srgbClr val="26231F"/>
+                </a:solidFill>
+              </a:rPr>
+              <a:t>FIRST BIRTHDAY</a:t>
+            </a:r>
+          </a:p>
+        </p:txBody>
+      </p:sp>
+      <p:sp>
+        <p:nvSpPr>
+          <p:cNvPr id="5" name="포인트"/>
+          <p:cNvSpPr/>
+          <p:nvPr/>
+        </p:nvSpPr>
+        <p:spPr>
+          <a:xfrm>
+            <a:off x="11213287" y="6473952"/>
+            <a:ext cx="219456" cy="219456"/>
+          </a:xfrm>
+          <a:prstGeom prst="star4">
+            <a:avLst/>
+          </a:prstGeom>
+          <a:solidFill>
+            <a:srgbClr val="7BB6EA"/>
+          </a:solidFill>
+          <a:ln>
+            <a:noFill/>
+          </a:ln>
+        </p:spPr>
+        <p:txBody>
+          <a:bodyPr rtlCol="0" anchor="ctr"/>
+          <a:lstStyle/>
+          <a:p>
+            <a:pPr algn="ctr"/>
+          </a:p>
+        </p:txBody>
+      </p:sp>
+      <p:sp>
+        <p:nvSpPr>
           <p:cNvPr id="2" name="Title 1"/>
           <p:cNvSpPr>
             <a:spLocks noGrp="1"/>
@@ -3516,8 +3678,8 @@
         </p:nvSpPr>
         <p:spPr>
           <a:xfrm>
-            <a:off x="640080" y="457200"/>
-            <a:ext cx="9722815" cy="868680"/>
+            <a:off x="640080" y="502920"/>
+            <a:ext cx="10911535" cy="914400"/>
           </a:xfrm>
         </p:spPr>
         <p:txBody>
@@ -3534,7 +3696,7 @@
             <a:r>
               <a:rPr sz="3000" b="1" i="0">
                 <a:solidFill>
-                  <a:srgbClr val="113B5F"/>
+                  <a:srgbClr val="26231F"/>
                 </a:solidFill>
               </a:rPr>
               <a:t>우리 아기를 소개합니다</a:t>
@@ -3544,14 +3706,14 @@
       </p:sp>
       <p:sp>
         <p:nvSpPr>
-          <p:cNvPr id="4" name="사진 자리"/>
+          <p:cNvPr id="6" name="사진 자리"/>
           <p:cNvSpPr/>
           <p:nvPr/>
         </p:nvSpPr>
         <p:spPr>
           <a:xfrm>
             <a:off x="640080" y="1600200"/>
-            <a:ext cx="3840480" cy="4617720"/>
+            <a:ext cx="3840480" cy="4389120"/>
           </a:xfrm>
           <a:prstGeom prst="roundRect">
             <a:avLst>
@@ -3562,9 +3724,7 @@
             <a:srgbClr val="D1E7FA"/>
           </a:solidFill>
           <a:ln w="19050">
-            <a:solidFill>
-              <a:srgbClr val="267BC5"/>
-            </a:solidFill>
+            <a:noFill/>
             <a:prstDash val="dash"/>
           </a:ln>
         </p:spPr>
@@ -3582,7 +3742,7 @@
             <a:r>
               <a:rPr sz="1400" b="0" i="0">
                 <a:solidFill>
-                  <a:srgbClr val="113B5F"/>
+                  <a:srgbClr val="8E8780"/>
                 </a:solidFill>
               </a:rPr>
               <a:t>아기 사진을 넣어 주세요</a:t>
@@ -3592,7 +3752,7 @@
       </p:sp>
       <p:graphicFrame>
         <p:nvGraphicFramePr>
-          <p:cNvPr id="5" name="표"/>
+          <p:cNvPr id="7" name="표"/>
           <p:cNvGraphicFramePr>
             <a:graphicFrameLocks noGrp="1"/>
           </p:cNvGraphicFramePr>
@@ -3622,7 +3782,7 @@
                       <a:r>
                         <a:rPr sz="1500" b="1">
                           <a:solidFill>
-                            <a:srgbClr val="113B5F"/>
+                            <a:srgbClr val="273949"/>
                           </a:solidFill>
                         </a:rPr>
                         <a:t>이름</a:t>
@@ -3668,7 +3828,7 @@
                       <a:r>
                         <a:rPr sz="1500" b="0">
                           <a:solidFill>
-                            <a:srgbClr val="2B2B2B"/>
+                            <a:srgbClr val="26231F"/>
                           </a:solidFill>
                         </a:rPr>
                         <a:t>입력하세요</a:t>
@@ -3701,7 +3861,7 @@
                       <a:prstDash val="solid"/>
                     </a:lnB>
                     <a:solidFill>
-                      <a:srgbClr val="EEF5FC"/>
+                      <a:srgbClr val="EAF4FD"/>
                     </a:solidFill>
                   </a:tcPr>
                 </a:tc>
@@ -3716,7 +3876,7 @@
                       <a:r>
                         <a:rPr sz="1500" b="1">
                           <a:solidFill>
-                            <a:srgbClr val="113B5F"/>
+                            <a:srgbClr val="273949"/>
                           </a:solidFill>
                         </a:rPr>
                         <a:t>생일</a:t>
@@ -3762,7 +3922,7 @@
                       <a:r>
                         <a:rPr sz="1500" b="0">
                           <a:solidFill>
-                            <a:srgbClr val="2B2B2B"/>
+                            <a:srgbClr val="26231F"/>
                           </a:solidFill>
                         </a:rPr>
                         <a:t>입력하세요</a:t>
@@ -3810,7 +3970,7 @@
                       <a:r>
                         <a:rPr sz="1500" b="1">
                           <a:solidFill>
-                            <a:srgbClr val="113B5F"/>
+                            <a:srgbClr val="273949"/>
                           </a:solidFill>
                         </a:rPr>
                         <a:t>키 · 몸무게</a:t>
@@ -3856,7 +4016,7 @@
                       <a:r>
                         <a:rPr sz="1500" b="0">
                           <a:solidFill>
-                            <a:srgbClr val="2B2B2B"/>
+                            <a:srgbClr val="26231F"/>
                           </a:solidFill>
                         </a:rPr>
                         <a:t>입력하세요</a:t>
@@ -3889,7 +4049,7 @@
                       <a:prstDash val="solid"/>
                     </a:lnB>
                     <a:solidFill>
-                      <a:srgbClr val="EEF5FC"/>
+                      <a:srgbClr val="EAF4FD"/>
                     </a:solidFill>
                   </a:tcPr>
                 </a:tc>
@@ -3904,7 +4064,7 @@
                       <a:r>
                         <a:rPr sz="1500" b="1">
                           <a:solidFill>
-                            <a:srgbClr val="113B5F"/>
+                            <a:srgbClr val="273949"/>
                           </a:solidFill>
                         </a:rPr>
                         <a:t>좋아하는 것</a:t>
@@ -3950,7 +4110,7 @@
                       <a:r>
                         <a:rPr sz="1500" b="0">
                           <a:solidFill>
-                            <a:srgbClr val="2B2B2B"/>
+                            <a:srgbClr val="26231F"/>
                           </a:solidFill>
                         </a:rPr>
                         <a:t>입력하세요</a:t>
@@ -3998,7 +4158,7 @@
                       <a:r>
                         <a:rPr sz="1500" b="1">
                           <a:solidFill>
-                            <a:srgbClr val="113B5F"/>
+                            <a:srgbClr val="273949"/>
                           </a:solidFill>
                         </a:rPr>
                         <a:t>별명</a:t>
@@ -4044,7 +4204,7 @@
                       <a:r>
                         <a:rPr sz="1500" b="0">
                           <a:solidFill>
-                            <a:srgbClr val="2B2B2B"/>
+                            <a:srgbClr val="26231F"/>
                           </a:solidFill>
                         </a:rPr>
                         <a:t>입력하세요</a:t>
@@ -4077,7 +4237,7 @@
                       <a:prstDash val="solid"/>
                     </a:lnB>
                     <a:solidFill>
-                      <a:srgbClr val="EEF5FC"/>
+                      <a:srgbClr val="EAF4FD"/>
                     </a:solidFill>
                   </a:tcPr>
                 </a:tc>
@@ -4092,7 +4252,7 @@
                       <a:r>
                         <a:rPr sz="1500" b="1">
                           <a:solidFill>
-                            <a:srgbClr val="113B5F"/>
+                            <a:srgbClr val="273949"/>
                           </a:solidFill>
                         </a:rPr>
                         <a:t>부모의 마음</a:t>
@@ -4138,7 +4298,7 @@
                       <a:r>
                         <a:rPr sz="1500" b="0">
                           <a:solidFill>
-                            <a:srgbClr val="2B2B2B"/>
+                            <a:srgbClr val="26231F"/>
                           </a:solidFill>
                         </a:rPr>
                         <a:t>입력하세요</a:t>
@@ -4194,7 +4354,7 @@
     <p:bg>
       <p:bgPr>
         <a:solidFill>
-          <a:srgbClr val="EEF5FC"/>
+          <a:srgbClr val="FFFFFF"/>
         </a:solidFill>
         <a:effectLst/>
       </p:bgPr>
@@ -4213,18 +4373,15 @@
           <p:nvPr/>
         </p:nvSpPr>
         <p:spPr>
-          <a:xfrm rot="10800000">
-            <a:off x="10637215" y="0"/>
-            <a:ext cx="914400" cy="1554480"/>
-          </a:xfrm>
-          <a:prstGeom prst="round2SameRect">
-            <a:avLst>
-              <a:gd name="adj1" fmla="val 50000"/>
-              <a:gd name="adj2" fmla="val 0"/>
-            </a:avLst>
+          <a:xfrm>
+            <a:off x="640080" y="6400800"/>
+            <a:ext cx="10911535" cy="10972"/>
+          </a:xfrm>
+          <a:prstGeom prst="rect">
+            <a:avLst/>
           </a:prstGeom>
           <a:solidFill>
-            <a:srgbClr val="D1E7FA"/>
+            <a:srgbClr val="26231F"/>
           </a:solidFill>
           <a:ln>
             <a:noFill/>
@@ -4240,6 +4397,73 @@
       </p:sp>
       <p:sp>
         <p:nvSpPr>
+          <p:cNvPr id="4" name="하단 라벨"/>
+          <p:cNvSpPr txBox="1"/>
+          <p:nvPr/>
+        </p:nvSpPr>
+        <p:spPr>
+          <a:xfrm>
+            <a:off x="640080" y="6437376"/>
+            <a:ext cx="5486400" cy="274320"/>
+          </a:xfrm>
+          <a:prstGeom prst="rect">
+            <a:avLst/>
+          </a:prstGeom>
+          <a:noFill/>
+        </p:spPr>
+        <p:txBody>
+          <a:bodyPr wrap="square" lIns="54864" rIns="54864" tIns="27432" bIns="27432" anchor="ctr">
+            <a:noAutofit/>
+          </a:bodyPr>
+          <a:lstStyle/>
+          <a:p>
+            <a:pPr algn="l">
+              <a:lnSpc>
+                <a:spcPct val="115000"/>
+              </a:lnSpc>
+            </a:pPr>
+            <a:r>
+              <a:rPr sz="900" b="1" i="0" spc="250">
+                <a:solidFill>
+                  <a:srgbClr val="26231F"/>
+                </a:solidFill>
+              </a:rPr>
+              <a:t>FIRST BIRTHDAY</a:t>
+            </a:r>
+          </a:p>
+        </p:txBody>
+      </p:sp>
+      <p:sp>
+        <p:nvSpPr>
+          <p:cNvPr id="5" name="포인트"/>
+          <p:cNvSpPr/>
+          <p:nvPr/>
+        </p:nvSpPr>
+        <p:spPr>
+          <a:xfrm>
+            <a:off x="11213287" y="6473952"/>
+            <a:ext cx="219456" cy="219456"/>
+          </a:xfrm>
+          <a:prstGeom prst="star4">
+            <a:avLst/>
+          </a:prstGeom>
+          <a:solidFill>
+            <a:srgbClr val="7BB6EA"/>
+          </a:solidFill>
+          <a:ln>
+            <a:noFill/>
+          </a:ln>
+        </p:spPr>
+        <p:txBody>
+          <a:bodyPr rtlCol="0" anchor="ctr"/>
+          <a:lstStyle/>
+          <a:p>
+            <a:pPr algn="ctr"/>
+          </a:p>
+        </p:txBody>
+      </p:sp>
+      <p:sp>
+        <p:nvSpPr>
           <p:cNvPr id="2" name="Title 1"/>
           <p:cNvSpPr>
             <a:spLocks noGrp="1"/>
@@ -4250,8 +4474,8 @@
         </p:nvSpPr>
         <p:spPr>
           <a:xfrm>
-            <a:off x="640080" y="457200"/>
-            <a:ext cx="9722815" cy="868680"/>
+            <a:off x="640080" y="502920"/>
+            <a:ext cx="10911535" cy="914400"/>
           </a:xfrm>
         </p:spPr>
         <p:txBody>
@@ -4268,7 +4492,7 @@
             <a:r>
               <a:rPr sz="3000" b="1" i="0">
                 <a:solidFill>
-                  <a:srgbClr val="113B5F"/>
+                  <a:srgbClr val="26231F"/>
                 </a:solidFill>
               </a:rPr>
               <a:t>돌잡이 이야기</a:t>
@@ -4278,26 +4502,26 @@
       </p:sp>
       <p:sp>
         <p:nvSpPr>
-          <p:cNvPr id="4" name="카드 1"/>
+          <p:cNvPr id="6" name="카드 1"/>
           <p:cNvSpPr/>
           <p:nvPr/>
         </p:nvSpPr>
         <p:spPr>
           <a:xfrm>
             <a:off x="640080" y="1600200"/>
-            <a:ext cx="2556433" cy="4800600"/>
+            <a:ext cx="2556433" cy="4572000"/>
           </a:xfrm>
           <a:prstGeom prst="roundRect">
             <a:avLst>
-              <a:gd name="adj" fmla="val 8000"/>
+              <a:gd name="adj" fmla="val 7000"/>
             </a:avLst>
           </a:prstGeom>
           <a:solidFill>
-            <a:srgbClr val="EEF5FC"/>
+            <a:srgbClr val="FFFFFF"/>
           </a:solidFill>
-          <a:ln w="15875">
+          <a:ln w="12700">
             <a:solidFill>
-              <a:srgbClr val="D1E7FA"/>
+              <a:srgbClr val="A5CFF3"/>
             </a:solidFill>
           </a:ln>
         </p:spPr>
@@ -4311,7 +4535,7 @@
       </p:sp>
       <p:sp>
         <p:nvSpPr>
-          <p:cNvPr id="5" name="번호 1"/>
+          <p:cNvPr id="7" name="번호 1"/>
           <p:cNvSpPr/>
           <p:nvPr/>
         </p:nvSpPr>
@@ -4320,11 +4544,13 @@
             <a:off x="822959" y="1783080"/>
             <a:ext cx="457200" cy="457200"/>
           </a:xfrm>
-          <a:prstGeom prst="ellipse">
-            <a:avLst/>
+          <a:prstGeom prst="roundRect">
+            <a:avLst>
+              <a:gd name="adj" fmla="val 25000"/>
+            </a:avLst>
           </a:prstGeom>
           <a:solidFill>
-            <a:srgbClr val="267BC5"/>
+            <a:srgbClr val="7BB6EA"/>
           </a:solidFill>
           <a:ln>
             <a:noFill/>
@@ -4344,7 +4570,7 @@
             <a:r>
               <a:rPr sz="1600" b="1" i="0">
                 <a:solidFill>
-                  <a:srgbClr val="FFFFFF"/>
+                  <a:srgbClr val="26231F"/>
                 </a:solidFill>
               </a:rPr>
               <a:t>1</a:t>
@@ -4354,7 +4580,7 @@
       </p:sp>
       <p:sp>
         <p:nvSpPr>
-          <p:cNvPr id="6" name="TextBox 5"/>
+          <p:cNvPr id="8" name="TextBox 7"/>
           <p:cNvSpPr txBox="1"/>
           <p:nvPr/>
         </p:nvSpPr>
@@ -4382,7 +4608,7 @@
             <a:r>
               <a:rPr sz="1600" b="1" i="0">
                 <a:solidFill>
-                  <a:srgbClr val="113B5F"/>
+                  <a:srgbClr val="273949"/>
                 </a:solidFill>
               </a:rPr>
               <a:t>연필 · 공부</a:t>
@@ -4392,14 +4618,14 @@
       </p:sp>
       <p:sp>
         <p:nvSpPr>
-          <p:cNvPr id="7" name="TextBox 6"/>
+          <p:cNvPr id="9" name="TextBox 8"/>
           <p:cNvSpPr txBox="1"/>
           <p:nvPr/>
         </p:nvSpPr>
         <p:spPr>
           <a:xfrm>
             <a:off x="777240" y="3063240"/>
-            <a:ext cx="2282113" cy="3200400"/>
+            <a:ext cx="2282113" cy="2971800"/>
           </a:xfrm>
           <a:prstGeom prst="rect">
             <a:avLst/>
@@ -4420,7 +4646,7 @@
             <a:r>
               <a:rPr sz="1400" b="0" i="0">
                 <a:solidFill>
-                  <a:srgbClr val="2B2B2B"/>
+                  <a:srgbClr val="26231F"/>
                 </a:solidFill>
               </a:rPr>
               <a:t>학문과 총명을 바라는 마음</a:t>
@@ -4430,26 +4656,26 @@
       </p:sp>
       <p:sp>
         <p:nvSpPr>
-          <p:cNvPr id="8" name="카드 2"/>
+          <p:cNvPr id="10" name="카드 2"/>
           <p:cNvSpPr/>
           <p:nvPr/>
         </p:nvSpPr>
         <p:spPr>
           <a:xfrm>
             <a:off x="3425113" y="1600200"/>
-            <a:ext cx="2556433" cy="4800600"/>
+            <a:ext cx="2556433" cy="4572000"/>
           </a:xfrm>
           <a:prstGeom prst="roundRect">
             <a:avLst>
-              <a:gd name="adj" fmla="val 8000"/>
+              <a:gd name="adj" fmla="val 7000"/>
             </a:avLst>
           </a:prstGeom>
           <a:solidFill>
-            <a:srgbClr val="EEF5FC"/>
+            <a:srgbClr val="FFFFFF"/>
           </a:solidFill>
-          <a:ln w="15875">
+          <a:ln w="12700">
             <a:solidFill>
-              <a:srgbClr val="D1E7FA"/>
+              <a:srgbClr val="A5CFF3"/>
             </a:solidFill>
           </a:ln>
         </p:spPr>
@@ -4463,7 +4689,7 @@
       </p:sp>
       <p:sp>
         <p:nvSpPr>
-          <p:cNvPr id="9" name="번호 2"/>
+          <p:cNvPr id="11" name="번호 2"/>
           <p:cNvSpPr/>
           <p:nvPr/>
         </p:nvSpPr>
@@ -4472,11 +4698,13 @@
             <a:off x="3607993" y="1783080"/>
             <a:ext cx="457200" cy="457200"/>
           </a:xfrm>
-          <a:prstGeom prst="ellipse">
-            <a:avLst/>
+          <a:prstGeom prst="roundRect">
+            <a:avLst>
+              <a:gd name="adj" fmla="val 25000"/>
+            </a:avLst>
           </a:prstGeom>
           <a:solidFill>
-            <a:srgbClr val="267BC5"/>
+            <a:srgbClr val="7BB6EA"/>
           </a:solidFill>
           <a:ln>
             <a:noFill/>
@@ -4496,7 +4724,7 @@
             <a:r>
               <a:rPr sz="1600" b="1" i="0">
                 <a:solidFill>
-                  <a:srgbClr val="FFFFFF"/>
+                  <a:srgbClr val="26231F"/>
                 </a:solidFill>
               </a:rPr>
               <a:t>2</a:t>
@@ -4506,7 +4734,7 @@
       </p:sp>
       <p:sp>
         <p:nvSpPr>
-          <p:cNvPr id="10" name="TextBox 9"/>
+          <p:cNvPr id="12" name="TextBox 11"/>
           <p:cNvSpPr txBox="1"/>
           <p:nvPr/>
         </p:nvSpPr>
@@ -4534,7 +4762,7 @@
             <a:r>
               <a:rPr sz="1600" b="1" i="0">
                 <a:solidFill>
-                  <a:srgbClr val="113B5F"/>
+                  <a:srgbClr val="273949"/>
                 </a:solidFill>
               </a:rPr>
               <a:t>실 · 장수</a:t>
@@ -4544,14 +4772,14 @@
       </p:sp>
       <p:sp>
         <p:nvSpPr>
-          <p:cNvPr id="11" name="TextBox 10"/>
+          <p:cNvPr id="13" name="TextBox 12"/>
           <p:cNvSpPr txBox="1"/>
           <p:nvPr/>
         </p:nvSpPr>
         <p:spPr>
           <a:xfrm>
             <a:off x="3562273" y="3063240"/>
-            <a:ext cx="2282113" cy="3200400"/>
+            <a:ext cx="2282113" cy="2971800"/>
           </a:xfrm>
           <a:prstGeom prst="rect">
             <a:avLst/>
@@ -4572,7 +4800,7 @@
             <a:r>
               <a:rPr sz="1400" b="0" i="0">
                 <a:solidFill>
-                  <a:srgbClr val="2B2B2B"/>
+                  <a:srgbClr val="26231F"/>
                 </a:solidFill>
               </a:rPr>
               <a:t>건강하고 오래 살기를</a:t>
@@ -4582,26 +4810,26 @@
       </p:sp>
       <p:sp>
         <p:nvSpPr>
-          <p:cNvPr id="12" name="카드 3"/>
+          <p:cNvPr id="14" name="카드 3"/>
           <p:cNvSpPr/>
           <p:nvPr/>
         </p:nvSpPr>
         <p:spPr>
           <a:xfrm>
             <a:off x="6210147" y="1600200"/>
-            <a:ext cx="2556433" cy="4800600"/>
+            <a:ext cx="2556433" cy="4572000"/>
           </a:xfrm>
           <a:prstGeom prst="roundRect">
             <a:avLst>
-              <a:gd name="adj" fmla="val 8000"/>
+              <a:gd name="adj" fmla="val 7000"/>
             </a:avLst>
           </a:prstGeom>
           <a:solidFill>
-            <a:srgbClr val="EEF5FC"/>
+            <a:srgbClr val="FFFFFF"/>
           </a:solidFill>
-          <a:ln w="15875">
+          <a:ln w="12700">
             <a:solidFill>
-              <a:srgbClr val="D1E7FA"/>
+              <a:srgbClr val="A5CFF3"/>
             </a:solidFill>
           </a:ln>
         </p:spPr>
@@ -4615,7 +4843,7 @@
       </p:sp>
       <p:sp>
         <p:nvSpPr>
-          <p:cNvPr id="13" name="번호 3"/>
+          <p:cNvPr id="15" name="번호 3"/>
           <p:cNvSpPr/>
           <p:nvPr/>
         </p:nvSpPr>
@@ -4624,11 +4852,13 @@
             <a:off x="6393027" y="1783080"/>
             <a:ext cx="457200" cy="457200"/>
           </a:xfrm>
-          <a:prstGeom prst="ellipse">
-            <a:avLst/>
+          <a:prstGeom prst="roundRect">
+            <a:avLst>
+              <a:gd name="adj" fmla="val 25000"/>
+            </a:avLst>
           </a:prstGeom>
           <a:solidFill>
-            <a:srgbClr val="267BC5"/>
+            <a:srgbClr val="7BB6EA"/>
           </a:solidFill>
           <a:ln>
             <a:noFill/>
@@ -4648,7 +4878,7 @@
             <a:r>
               <a:rPr sz="1600" b="1" i="0">
                 <a:solidFill>
-                  <a:srgbClr val="FFFFFF"/>
+                  <a:srgbClr val="26231F"/>
                 </a:solidFill>
               </a:rPr>
               <a:t>3</a:t>
@@ -4658,7 +4888,7 @@
       </p:sp>
       <p:sp>
         <p:nvSpPr>
-          <p:cNvPr id="14" name="TextBox 13"/>
+          <p:cNvPr id="16" name="TextBox 15"/>
           <p:cNvSpPr txBox="1"/>
           <p:nvPr/>
         </p:nvSpPr>
@@ -4686,7 +4916,7 @@
             <a:r>
               <a:rPr sz="1600" b="1" i="0">
                 <a:solidFill>
-                  <a:srgbClr val="113B5F"/>
+                  <a:srgbClr val="273949"/>
                 </a:solidFill>
               </a:rPr>
               <a:t>돈 · 부</a:t>
@@ -4696,14 +4926,14 @@
       </p:sp>
       <p:sp>
         <p:nvSpPr>
-          <p:cNvPr id="15" name="TextBox 14"/>
+          <p:cNvPr id="17" name="TextBox 16"/>
           <p:cNvSpPr txBox="1"/>
           <p:nvPr/>
         </p:nvSpPr>
         <p:spPr>
           <a:xfrm>
             <a:off x="6347307" y="3063240"/>
-            <a:ext cx="2282113" cy="3200400"/>
+            <a:ext cx="2282113" cy="2971800"/>
           </a:xfrm>
           <a:prstGeom prst="rect">
             <a:avLst/>
@@ -4724,7 +4954,7 @@
             <a:r>
               <a:rPr sz="1400" b="0" i="0">
                 <a:solidFill>
-                  <a:srgbClr val="2B2B2B"/>
+                  <a:srgbClr val="26231F"/>
                 </a:solidFill>
               </a:rPr>
               <a:t>넉넉한 삶을 바라는 마음</a:t>
@@ -4734,26 +4964,26 @@
       </p:sp>
       <p:sp>
         <p:nvSpPr>
-          <p:cNvPr id="16" name="카드 4"/>
+          <p:cNvPr id="18" name="카드 4"/>
           <p:cNvSpPr/>
           <p:nvPr/>
         </p:nvSpPr>
         <p:spPr>
           <a:xfrm>
             <a:off x="8995181" y="1600200"/>
-            <a:ext cx="2556433" cy="4800600"/>
+            <a:ext cx="2556433" cy="4572000"/>
           </a:xfrm>
           <a:prstGeom prst="roundRect">
             <a:avLst>
-              <a:gd name="adj" fmla="val 8000"/>
+              <a:gd name="adj" fmla="val 7000"/>
             </a:avLst>
           </a:prstGeom>
           <a:solidFill>
-            <a:srgbClr val="EEF5FC"/>
+            <a:srgbClr val="FFFFFF"/>
           </a:solidFill>
-          <a:ln w="15875">
+          <a:ln w="12700">
             <a:solidFill>
-              <a:srgbClr val="D1E7FA"/>
+              <a:srgbClr val="A5CFF3"/>
             </a:solidFill>
           </a:ln>
         </p:spPr>
@@ -4767,7 +4997,7 @@
       </p:sp>
       <p:sp>
         <p:nvSpPr>
-          <p:cNvPr id="17" name="번호 4"/>
+          <p:cNvPr id="19" name="번호 4"/>
           <p:cNvSpPr/>
           <p:nvPr/>
         </p:nvSpPr>
@@ -4776,11 +5006,13 @@
             <a:off x="9178061" y="1783080"/>
             <a:ext cx="457200" cy="457200"/>
           </a:xfrm>
-          <a:prstGeom prst="ellipse">
-            <a:avLst/>
+          <a:prstGeom prst="roundRect">
+            <a:avLst>
+              <a:gd name="adj" fmla="val 25000"/>
+            </a:avLst>
           </a:prstGeom>
           <a:solidFill>
-            <a:srgbClr val="267BC5"/>
+            <a:srgbClr val="7BB6EA"/>
           </a:solidFill>
           <a:ln>
             <a:noFill/>
@@ -4800,7 +5032,7 @@
             <a:r>
               <a:rPr sz="1600" b="1" i="0">
                 <a:solidFill>
-                  <a:srgbClr val="FFFFFF"/>
+                  <a:srgbClr val="26231F"/>
                 </a:solidFill>
               </a:rPr>
               <a:t>4</a:t>
@@ -4810,7 +5042,7 @@
       </p:sp>
       <p:sp>
         <p:nvSpPr>
-          <p:cNvPr id="18" name="TextBox 17"/>
+          <p:cNvPr id="20" name="TextBox 19"/>
           <p:cNvSpPr txBox="1"/>
           <p:nvPr/>
         </p:nvSpPr>
@@ -4838,7 +5070,7 @@
             <a:r>
               <a:rPr sz="1600" b="1" i="0">
                 <a:solidFill>
-                  <a:srgbClr val="113B5F"/>
+                  <a:srgbClr val="273949"/>
                 </a:solidFill>
               </a:rPr>
               <a:t>마이크 · 인기</a:t>
@@ -4848,14 +5080,14 @@
       </p:sp>
       <p:sp>
         <p:nvSpPr>
-          <p:cNvPr id="19" name="TextBox 18"/>
+          <p:cNvPr id="21" name="TextBox 20"/>
           <p:cNvSpPr txBox="1"/>
           <p:nvPr/>
         </p:nvSpPr>
         <p:spPr>
           <a:xfrm>
             <a:off x="9132341" y="3063240"/>
-            <a:ext cx="2282113" cy="3200400"/>
+            <a:ext cx="2282113" cy="2971800"/>
           </a:xfrm>
           <a:prstGeom prst="rect">
             <a:avLst/>
@@ -4876,7 +5108,7 @@
             <a:r>
               <a:rPr sz="1400" b="0" i="0">
                 <a:solidFill>
-                  <a:srgbClr val="2B2B2B"/>
+                  <a:srgbClr val="26231F"/>
                 </a:solidFill>
               </a:rPr>
               <a:t>사람들에게 사랑받기를</a:t>
@@ -4898,7 +5130,7 @@
     <p:bg>
       <p:bgPr>
         <a:solidFill>
-          <a:srgbClr val="EEF5FC"/>
+          <a:srgbClr val="FFFFFF"/>
         </a:solidFill>
         <a:effectLst/>
       </p:bgPr>
@@ -4917,18 +5149,15 @@
           <p:nvPr/>
         </p:nvSpPr>
         <p:spPr>
-          <a:xfrm rot="10800000">
-            <a:off x="10637215" y="0"/>
-            <a:ext cx="914400" cy="1554480"/>
-          </a:xfrm>
-          <a:prstGeom prst="round2SameRect">
-            <a:avLst>
-              <a:gd name="adj1" fmla="val 50000"/>
-              <a:gd name="adj2" fmla="val 0"/>
-            </a:avLst>
+          <a:xfrm>
+            <a:off x="640080" y="6400800"/>
+            <a:ext cx="10911535" cy="10972"/>
+          </a:xfrm>
+          <a:prstGeom prst="rect">
+            <a:avLst/>
           </a:prstGeom>
           <a:solidFill>
-            <a:srgbClr val="D1E7FA"/>
+            <a:srgbClr val="26231F"/>
           </a:solidFill>
           <a:ln>
             <a:noFill/>
@@ -4944,6 +5173,73 @@
       </p:sp>
       <p:sp>
         <p:nvSpPr>
+          <p:cNvPr id="4" name="하단 라벨"/>
+          <p:cNvSpPr txBox="1"/>
+          <p:nvPr/>
+        </p:nvSpPr>
+        <p:spPr>
+          <a:xfrm>
+            <a:off x="640080" y="6437376"/>
+            <a:ext cx="5486400" cy="274320"/>
+          </a:xfrm>
+          <a:prstGeom prst="rect">
+            <a:avLst/>
+          </a:prstGeom>
+          <a:noFill/>
+        </p:spPr>
+        <p:txBody>
+          <a:bodyPr wrap="square" lIns="54864" rIns="54864" tIns="27432" bIns="27432" anchor="ctr">
+            <a:noAutofit/>
+          </a:bodyPr>
+          <a:lstStyle/>
+          <a:p>
+            <a:pPr algn="l">
+              <a:lnSpc>
+                <a:spcPct val="115000"/>
+              </a:lnSpc>
+            </a:pPr>
+            <a:r>
+              <a:rPr sz="900" b="1" i="0" spc="250">
+                <a:solidFill>
+                  <a:srgbClr val="26231F"/>
+                </a:solidFill>
+              </a:rPr>
+              <a:t>FIRST BIRTHDAY</a:t>
+            </a:r>
+          </a:p>
+        </p:txBody>
+      </p:sp>
+      <p:sp>
+        <p:nvSpPr>
+          <p:cNvPr id="5" name="포인트"/>
+          <p:cNvSpPr/>
+          <p:nvPr/>
+        </p:nvSpPr>
+        <p:spPr>
+          <a:xfrm>
+            <a:off x="11213287" y="6473952"/>
+            <a:ext cx="219456" cy="219456"/>
+          </a:xfrm>
+          <a:prstGeom prst="star4">
+            <a:avLst/>
+          </a:prstGeom>
+          <a:solidFill>
+            <a:srgbClr val="7BB6EA"/>
+          </a:solidFill>
+          <a:ln>
+            <a:noFill/>
+          </a:ln>
+        </p:spPr>
+        <p:txBody>
+          <a:bodyPr rtlCol="0" anchor="ctr"/>
+          <a:lstStyle/>
+          <a:p>
+            <a:pPr algn="ctr"/>
+          </a:p>
+        </p:txBody>
+      </p:sp>
+      <p:sp>
+        <p:nvSpPr>
           <p:cNvPr id="2" name="Title 1"/>
           <p:cNvSpPr>
             <a:spLocks noGrp="1"/>
@@ -4954,8 +5250,8 @@
         </p:nvSpPr>
         <p:spPr>
           <a:xfrm>
-            <a:off x="640080" y="457200"/>
-            <a:ext cx="9722815" cy="868680"/>
+            <a:off x="640080" y="502920"/>
+            <a:ext cx="10911535" cy="914400"/>
           </a:xfrm>
         </p:spPr>
         <p:txBody>
@@ -4972,7 +5268,7 @@
             <a:r>
               <a:rPr sz="3000" b="1" i="0">
                 <a:solidFill>
-                  <a:srgbClr val="113B5F"/>
+                  <a:srgbClr val="26231F"/>
                 </a:solidFill>
               </a:rPr>
               <a:t>우리 아기의 선택은?</a:t>
@@ -4982,14 +5278,14 @@
       </p:sp>
       <p:sp>
         <p:nvSpPr>
-          <p:cNvPr id="4" name="사진 자리"/>
+          <p:cNvPr id="6" name="사진 자리"/>
           <p:cNvSpPr/>
           <p:nvPr/>
         </p:nvSpPr>
         <p:spPr>
           <a:xfrm>
             <a:off x="640080" y="1600200"/>
-            <a:ext cx="4572000" cy="4800600"/>
+            <a:ext cx="4572000" cy="4572000"/>
           </a:xfrm>
           <a:prstGeom prst="roundRect">
             <a:avLst>
@@ -5000,9 +5296,7 @@
             <a:srgbClr val="D1E7FA"/>
           </a:solidFill>
           <a:ln w="19050">
-            <a:solidFill>
-              <a:srgbClr val="267BC5"/>
-            </a:solidFill>
+            <a:noFill/>
             <a:prstDash val="dash"/>
           </a:ln>
         </p:spPr>
@@ -5020,7 +5314,7 @@
             <a:r>
               <a:rPr sz="1400" b="0" i="0">
                 <a:solidFill>
-                  <a:srgbClr val="113B5F"/>
+                  <a:srgbClr val="8E8780"/>
                 </a:solidFill>
               </a:rPr>
               <a:t>돌잡이 사진</a:t>
@@ -5030,26 +5324,26 @@
       </p:sp>
       <p:sp>
         <p:nvSpPr>
-          <p:cNvPr id="5" name="선택 칸"/>
+          <p:cNvPr id="7" name="선택 칸"/>
           <p:cNvSpPr/>
           <p:nvPr/>
         </p:nvSpPr>
         <p:spPr>
           <a:xfrm>
             <a:off x="5577840" y="1600200"/>
-            <a:ext cx="5973775" cy="4800600"/>
+            <a:ext cx="5973775" cy="4572000"/>
           </a:xfrm>
           <a:prstGeom prst="roundRect">
             <a:avLst>
-              <a:gd name="adj" fmla="val 8000"/>
+              <a:gd name="adj" fmla="val 7000"/>
             </a:avLst>
           </a:prstGeom>
           <a:solidFill>
-            <a:srgbClr val="EEF5FC"/>
+            <a:srgbClr val="FFFFFF"/>
           </a:solidFill>
           <a:ln w="12700">
             <a:solidFill>
-              <a:srgbClr val="D1E7FA"/>
+              <a:srgbClr val="A5CFF3"/>
             </a:solidFill>
           </a:ln>
         </p:spPr>
@@ -5063,14 +5357,14 @@
       </p:sp>
       <p:sp>
         <p:nvSpPr>
-          <p:cNvPr id="6" name="TextBox 5"/>
+          <p:cNvPr id="8" name="TextBox 7"/>
           <p:cNvSpPr txBox="1"/>
           <p:nvPr/>
         </p:nvSpPr>
         <p:spPr>
           <a:xfrm>
             <a:off x="5852160" y="1874519"/>
-            <a:ext cx="5425135" cy="4251960"/>
+            <a:ext cx="5425135" cy="4023360"/>
           </a:xfrm>
           <a:prstGeom prst="rect">
             <a:avLst/>
@@ -5091,7 +5385,7 @@
             <a:r>
               <a:rPr sz="1800" b="0" i="0">
                 <a:solidFill>
-                  <a:srgbClr val="2B2B2B"/>
+                  <a:srgbClr val="26231F"/>
                 </a:solidFill>
               </a:rPr>
               <a:t>우리 아기의 선택</a:t>
@@ -5106,7 +5400,7 @@
             <a:r>
               <a:rPr sz="1800" b="0" i="0">
                 <a:solidFill>
-                  <a:srgbClr val="2B2B2B"/>
+                  <a:srgbClr val="26231F"/>
                 </a:solidFill>
               </a:rPr>
               <a:t/>
@@ -5121,7 +5415,7 @@
             <a:r>
               <a:rPr sz="1800" b="0" i="0">
                 <a:solidFill>
-                  <a:srgbClr val="2B2B2B"/>
+                  <a:srgbClr val="26231F"/>
                 </a:solidFill>
               </a:rPr>
               <a:t>무엇을 집었나요?</a:t>
@@ -5136,7 +5430,7 @@
             <a:r>
               <a:rPr sz="1800" b="0" i="0">
                 <a:solidFill>
-                  <a:srgbClr val="2B2B2B"/>
+                  <a:srgbClr val="26231F"/>
                 </a:solidFill>
               </a:rPr>
               <a:t/>
@@ -5151,7 +5445,7 @@
             <a:r>
               <a:rPr sz="1800" b="0" i="0">
                 <a:solidFill>
-                  <a:srgbClr val="2B2B2B"/>
+                  <a:srgbClr val="26231F"/>
                 </a:solidFill>
               </a:rPr>
               <a:t>그때 가족의 반응은?</a:t>
@@ -5173,7 +5467,7 @@
     <p:bg>
       <p:bgPr>
         <a:solidFill>
-          <a:srgbClr val="EEF5FC"/>
+          <a:srgbClr val="FFFFFF"/>
         </a:solidFill>
         <a:effectLst/>
       </p:bgPr>
@@ -5192,18 +5486,15 @@
           <p:nvPr/>
         </p:nvSpPr>
         <p:spPr>
-          <a:xfrm rot="10800000">
-            <a:off x="10637215" y="0"/>
-            <a:ext cx="914400" cy="1554480"/>
-          </a:xfrm>
-          <a:prstGeom prst="round2SameRect">
-            <a:avLst>
-              <a:gd name="adj1" fmla="val 50000"/>
-              <a:gd name="adj2" fmla="val 0"/>
-            </a:avLst>
+          <a:xfrm>
+            <a:off x="640080" y="6400800"/>
+            <a:ext cx="10911535" cy="10972"/>
+          </a:xfrm>
+          <a:prstGeom prst="rect">
+            <a:avLst/>
           </a:prstGeom>
           <a:solidFill>
-            <a:srgbClr val="D1E7FA"/>
+            <a:srgbClr val="26231F"/>
           </a:solidFill>
           <a:ln>
             <a:noFill/>
@@ -5219,6 +5510,73 @@
       </p:sp>
       <p:sp>
         <p:nvSpPr>
+          <p:cNvPr id="4" name="하단 라벨"/>
+          <p:cNvSpPr txBox="1"/>
+          <p:nvPr/>
+        </p:nvSpPr>
+        <p:spPr>
+          <a:xfrm>
+            <a:off x="640080" y="6437376"/>
+            <a:ext cx="5486400" cy="274320"/>
+          </a:xfrm>
+          <a:prstGeom prst="rect">
+            <a:avLst/>
+          </a:prstGeom>
+          <a:noFill/>
+        </p:spPr>
+        <p:txBody>
+          <a:bodyPr wrap="square" lIns="54864" rIns="54864" tIns="27432" bIns="27432" anchor="ctr">
+            <a:noAutofit/>
+          </a:bodyPr>
+          <a:lstStyle/>
+          <a:p>
+            <a:pPr algn="l">
+              <a:lnSpc>
+                <a:spcPct val="115000"/>
+              </a:lnSpc>
+            </a:pPr>
+            <a:r>
+              <a:rPr sz="900" b="1" i="0" spc="250">
+                <a:solidFill>
+                  <a:srgbClr val="26231F"/>
+                </a:solidFill>
+              </a:rPr>
+              <a:t>FIRST BIRTHDAY</a:t>
+            </a:r>
+          </a:p>
+        </p:txBody>
+      </p:sp>
+      <p:sp>
+        <p:nvSpPr>
+          <p:cNvPr id="5" name="포인트"/>
+          <p:cNvSpPr/>
+          <p:nvPr/>
+        </p:nvSpPr>
+        <p:spPr>
+          <a:xfrm>
+            <a:off x="11213287" y="6473952"/>
+            <a:ext cx="219456" cy="219456"/>
+          </a:xfrm>
+          <a:prstGeom prst="star4">
+            <a:avLst/>
+          </a:prstGeom>
+          <a:solidFill>
+            <a:srgbClr val="7BB6EA"/>
+          </a:solidFill>
+          <a:ln>
+            <a:noFill/>
+          </a:ln>
+        </p:spPr>
+        <p:txBody>
+          <a:bodyPr rtlCol="0" anchor="ctr"/>
+          <a:lstStyle/>
+          <a:p>
+            <a:pPr algn="ctr"/>
+          </a:p>
+        </p:txBody>
+      </p:sp>
+      <p:sp>
+        <p:nvSpPr>
           <p:cNvPr id="2" name="Title 1"/>
           <p:cNvSpPr>
             <a:spLocks noGrp="1"/>
@@ -5229,8 +5587,8 @@
         </p:nvSpPr>
         <p:spPr>
           <a:xfrm>
-            <a:off x="640080" y="457200"/>
-            <a:ext cx="9722815" cy="868680"/>
+            <a:off x="640080" y="502920"/>
+            <a:ext cx="10911535" cy="914400"/>
           </a:xfrm>
         </p:spPr>
         <p:txBody>
@@ -5247,7 +5605,7 @@
             <a:r>
               <a:rPr sz="3000" b="1" i="0">
                 <a:solidFill>
-                  <a:srgbClr val="113B5F"/>
+                  <a:srgbClr val="26231F"/>
                 </a:solidFill>
               </a:rPr>
               <a:t>사진 모음</a:t>
@@ -5257,14 +5615,14 @@
       </p:sp>
       <p:sp>
         <p:nvSpPr>
-          <p:cNvPr id="4" name="사진 자리"/>
+          <p:cNvPr id="6" name="사진 자리"/>
           <p:cNvSpPr/>
           <p:nvPr/>
         </p:nvSpPr>
         <p:spPr>
           <a:xfrm>
             <a:off x="640080" y="1600200"/>
-            <a:ext cx="2590723" cy="2308860"/>
+            <a:ext cx="2590723" cy="2194560"/>
           </a:xfrm>
           <a:prstGeom prst="roundRect">
             <a:avLst>
@@ -5275,9 +5633,7 @@
             <a:srgbClr val="D1E7FA"/>
           </a:solidFill>
           <a:ln w="19050">
-            <a:solidFill>
-              <a:srgbClr val="267BC5"/>
-            </a:solidFill>
+            <a:noFill/>
             <a:prstDash val="dash"/>
           </a:ln>
         </p:spPr>
@@ -5295,7 +5651,7 @@
             <a:r>
               <a:rPr sz="1200" b="0" i="0">
                 <a:solidFill>
-                  <a:srgbClr val="113B5F"/>
+                  <a:srgbClr val="8E8780"/>
                 </a:solidFill>
               </a:rPr>
               <a:t>사진 1</a:t>
@@ -5305,14 +5661,14 @@
       </p:sp>
       <p:sp>
         <p:nvSpPr>
-          <p:cNvPr id="5" name="사진 자리"/>
+          <p:cNvPr id="7" name="사진 자리"/>
           <p:cNvSpPr/>
           <p:nvPr/>
         </p:nvSpPr>
         <p:spPr>
           <a:xfrm>
             <a:off x="3413683" y="1600200"/>
-            <a:ext cx="2590723" cy="2308860"/>
+            <a:ext cx="2590723" cy="2194560"/>
           </a:xfrm>
           <a:prstGeom prst="roundRect">
             <a:avLst>
@@ -5323,9 +5679,7 @@
             <a:srgbClr val="D1E7FA"/>
           </a:solidFill>
           <a:ln w="19050">
-            <a:solidFill>
-              <a:srgbClr val="267BC5"/>
-            </a:solidFill>
+            <a:noFill/>
             <a:prstDash val="dash"/>
           </a:ln>
         </p:spPr>
@@ -5343,7 +5697,7 @@
             <a:r>
               <a:rPr sz="1200" b="0" i="0">
                 <a:solidFill>
-                  <a:srgbClr val="113B5F"/>
+                  <a:srgbClr val="8E8780"/>
                 </a:solidFill>
               </a:rPr>
               <a:t>사진 2</a:t>
@@ -5353,14 +5707,14 @@
       </p:sp>
       <p:sp>
         <p:nvSpPr>
-          <p:cNvPr id="6" name="사진 자리"/>
+          <p:cNvPr id="8" name="사진 자리"/>
           <p:cNvSpPr/>
           <p:nvPr/>
         </p:nvSpPr>
         <p:spPr>
           <a:xfrm>
             <a:off x="6187287" y="1600200"/>
-            <a:ext cx="2590723" cy="2308860"/>
+            <a:ext cx="2590723" cy="2194560"/>
           </a:xfrm>
           <a:prstGeom prst="roundRect">
             <a:avLst>
@@ -5371,9 +5725,7 @@
             <a:srgbClr val="D1E7FA"/>
           </a:solidFill>
           <a:ln w="19050">
-            <a:solidFill>
-              <a:srgbClr val="267BC5"/>
-            </a:solidFill>
+            <a:noFill/>
             <a:prstDash val="dash"/>
           </a:ln>
         </p:spPr>
@@ -5391,7 +5743,7 @@
             <a:r>
               <a:rPr sz="1200" b="0" i="0">
                 <a:solidFill>
-                  <a:srgbClr val="113B5F"/>
+                  <a:srgbClr val="8E8780"/>
                 </a:solidFill>
               </a:rPr>
               <a:t>사진 3</a:t>
@@ -5401,14 +5753,14 @@
       </p:sp>
       <p:sp>
         <p:nvSpPr>
-          <p:cNvPr id="7" name="사진 자리"/>
+          <p:cNvPr id="9" name="사진 자리"/>
           <p:cNvSpPr/>
           <p:nvPr/>
         </p:nvSpPr>
         <p:spPr>
           <a:xfrm>
             <a:off x="8960891" y="1600200"/>
-            <a:ext cx="2590723" cy="2308860"/>
+            <a:ext cx="2590723" cy="2194560"/>
           </a:xfrm>
           <a:prstGeom prst="roundRect">
             <a:avLst>
@@ -5419,9 +5771,7 @@
             <a:srgbClr val="D1E7FA"/>
           </a:solidFill>
           <a:ln w="19050">
-            <a:solidFill>
-              <a:srgbClr val="267BC5"/>
-            </a:solidFill>
+            <a:noFill/>
             <a:prstDash val="dash"/>
           </a:ln>
         </p:spPr>
@@ -5439,7 +5789,7 @@
             <a:r>
               <a:rPr sz="1200" b="0" i="0">
                 <a:solidFill>
-                  <a:srgbClr val="113B5F"/>
+                  <a:srgbClr val="8E8780"/>
                 </a:solidFill>
               </a:rPr>
               <a:t>사진 4</a:t>
@@ -5449,14 +5799,14 @@
       </p:sp>
       <p:sp>
         <p:nvSpPr>
-          <p:cNvPr id="8" name="사진 자리"/>
+          <p:cNvPr id="10" name="사진 자리"/>
           <p:cNvSpPr/>
           <p:nvPr/>
         </p:nvSpPr>
         <p:spPr>
           <a:xfrm>
-            <a:off x="640080" y="4091939"/>
-            <a:ext cx="2590723" cy="2308860"/>
+            <a:off x="640080" y="3977639"/>
+            <a:ext cx="2590723" cy="2194560"/>
           </a:xfrm>
           <a:prstGeom prst="roundRect">
             <a:avLst>
@@ -5467,9 +5817,7 @@
             <a:srgbClr val="D1E7FA"/>
           </a:solidFill>
           <a:ln w="19050">
-            <a:solidFill>
-              <a:srgbClr val="267BC5"/>
-            </a:solidFill>
+            <a:noFill/>
             <a:prstDash val="dash"/>
           </a:ln>
         </p:spPr>
@@ -5487,7 +5835,7 @@
             <a:r>
               <a:rPr sz="1200" b="0" i="0">
                 <a:solidFill>
-                  <a:srgbClr val="113B5F"/>
+                  <a:srgbClr val="8E8780"/>
                 </a:solidFill>
               </a:rPr>
               <a:t>사진 5</a:t>
@@ -5497,14 +5845,14 @@
       </p:sp>
       <p:sp>
         <p:nvSpPr>
-          <p:cNvPr id="9" name="사진 자리"/>
+          <p:cNvPr id="11" name="사진 자리"/>
           <p:cNvSpPr/>
           <p:nvPr/>
         </p:nvSpPr>
         <p:spPr>
           <a:xfrm>
-            <a:off x="3413683" y="4091939"/>
-            <a:ext cx="2590723" cy="2308860"/>
+            <a:off x="3413683" y="3977639"/>
+            <a:ext cx="2590723" cy="2194560"/>
           </a:xfrm>
           <a:prstGeom prst="roundRect">
             <a:avLst>
@@ -5515,9 +5863,7 @@
             <a:srgbClr val="D1E7FA"/>
           </a:solidFill>
           <a:ln w="19050">
-            <a:solidFill>
-              <a:srgbClr val="267BC5"/>
-            </a:solidFill>
+            <a:noFill/>
             <a:prstDash val="dash"/>
           </a:ln>
         </p:spPr>
@@ -5535,7 +5881,7 @@
             <a:r>
               <a:rPr sz="1200" b="0" i="0">
                 <a:solidFill>
-                  <a:srgbClr val="113B5F"/>
+                  <a:srgbClr val="8E8780"/>
                 </a:solidFill>
               </a:rPr>
               <a:t>사진 6</a:t>
@@ -5545,14 +5891,14 @@
       </p:sp>
       <p:sp>
         <p:nvSpPr>
-          <p:cNvPr id="10" name="사진 자리"/>
+          <p:cNvPr id="12" name="사진 자리"/>
           <p:cNvSpPr/>
           <p:nvPr/>
         </p:nvSpPr>
         <p:spPr>
           <a:xfrm>
-            <a:off x="6187287" y="4091939"/>
-            <a:ext cx="2590723" cy="2308860"/>
+            <a:off x="6187287" y="3977639"/>
+            <a:ext cx="2590723" cy="2194560"/>
           </a:xfrm>
           <a:prstGeom prst="roundRect">
             <a:avLst>
@@ -5563,9 +5909,7 @@
             <a:srgbClr val="D1E7FA"/>
           </a:solidFill>
           <a:ln w="19050">
-            <a:solidFill>
-              <a:srgbClr val="267BC5"/>
-            </a:solidFill>
+            <a:noFill/>
             <a:prstDash val="dash"/>
           </a:ln>
         </p:spPr>
@@ -5583,7 +5927,7 @@
             <a:r>
               <a:rPr sz="1200" b="0" i="0">
                 <a:solidFill>
-                  <a:srgbClr val="113B5F"/>
+                  <a:srgbClr val="8E8780"/>
                 </a:solidFill>
               </a:rPr>
               <a:t>사진 7</a:t>
@@ -5593,14 +5937,14 @@
       </p:sp>
       <p:sp>
         <p:nvSpPr>
-          <p:cNvPr id="11" name="사진 자리"/>
+          <p:cNvPr id="13" name="사진 자리"/>
           <p:cNvSpPr/>
           <p:nvPr/>
         </p:nvSpPr>
         <p:spPr>
           <a:xfrm>
-            <a:off x="8960891" y="4091939"/>
-            <a:ext cx="2590723" cy="2308860"/>
+            <a:off x="8960891" y="3977639"/>
+            <a:ext cx="2590723" cy="2194560"/>
           </a:xfrm>
           <a:prstGeom prst="roundRect">
             <a:avLst>
@@ -5611,9 +5955,7 @@
             <a:srgbClr val="D1E7FA"/>
           </a:solidFill>
           <a:ln w="19050">
-            <a:solidFill>
-              <a:srgbClr val="267BC5"/>
-            </a:solidFill>
+            <a:noFill/>
             <a:prstDash val="dash"/>
           </a:ln>
         </p:spPr>
@@ -5631,7 +5973,7 @@
             <a:r>
               <a:rPr sz="1200" b="0" i="0">
                 <a:solidFill>
-                  <a:srgbClr val="113B5F"/>
+                  <a:srgbClr val="8E8780"/>
                 </a:solidFill>
               </a:rPr>
               <a:t>사진 8</a:t>
@@ -5650,6 +5992,14 @@
 <file path=ppt/slides/slide6.xml><?xml version="1.0" encoding="utf-8"?>
 <p:sld xmlns:a="http://schemas.openxmlformats.org/drawingml/2006/main" xmlns:p="http://schemas.openxmlformats.org/presentationml/2006/main" xmlns:r="http://schemas.openxmlformats.org/officeDocument/2006/relationships">
   <p:cSld>
+    <p:bg>
+      <p:bgPr>
+        <a:solidFill>
+          <a:srgbClr val="EAF4FD"/>
+        </a:solidFill>
+        <a:effectLst/>
+      </p:bgPr>
+    </p:bg>
     <p:spTree>
       <p:nvGrpSpPr>
         <p:cNvPr id="1" name=""/>
@@ -5657,30 +6007,120 @@
         <p:nvPr/>
       </p:nvGrpSpPr>
       <p:grpSpPr/>
-      <p:pic>
-        <p:nvPicPr>
-          <p:cNvPr id="3" name="표지 그림" descr="birthday-22.jpg"/>
-          <p:cNvPicPr>
-            <a:picLocks noChangeAspect="1"/>
-          </p:cNvPicPr>
+      <p:sp>
+        <p:nvSpPr>
+          <p:cNvPr id="3" name="사진 자리"/>
+          <p:cNvSpPr/>
           <p:nvPr/>
-        </p:nvPicPr>
-        <p:blipFill>
-          <a:blip r:embed="rId2"/>
-          <a:stretch>
-            <a:fillRect/>
-          </a:stretch>
-        </p:blipFill>
-        <p:spPr>
-          <a:xfrm>
-            <a:off x="0" y="0"/>
-            <a:ext cx="12191695" cy="6858000"/>
+        </p:nvSpPr>
+        <p:spPr>
+          <a:xfrm>
+            <a:off x="1463003" y="960120"/>
+            <a:ext cx="3657508" cy="4526280"/>
+          </a:xfrm>
+          <a:prstGeom prst="roundRect">
+            <a:avLst>
+              <a:gd name="adj" fmla="val 4000"/>
+            </a:avLst>
+          </a:prstGeom>
+          <a:solidFill>
+            <a:srgbClr val="A5CFF3"/>
+          </a:solidFill>
+          <a:ln>
+            <a:noFill/>
+          </a:ln>
+        </p:spPr>
+        <p:txBody>
+          <a:bodyPr rtlCol="0" anchor="ctr" wrap="square" lIns="54864" rIns="54864" tIns="27432" bIns="27432">
+            <a:noAutofit/>
+          </a:bodyPr>
+          <a:lstStyle/>
+          <a:p>
+            <a:pPr algn="ctr">
+              <a:lnSpc>
+                <a:spcPct val="100000"/>
+              </a:lnSpc>
+            </a:pPr>
+            <a:r>
+              <a:rPr sz="1400" b="0" i="0">
+                <a:solidFill>
+                  <a:srgbClr val="273949"/>
+                </a:solidFill>
+              </a:rPr>
+              <a:t>사진을 넣어 주세요</a:t>
+            </a:r>
+          </a:p>
+        </p:txBody>
+      </p:sp>
+      <p:sp>
+        <p:nvSpPr>
+          <p:cNvPr id="4" name="장식"/>
+          <p:cNvSpPr/>
+          <p:nvPr/>
+        </p:nvSpPr>
+        <p:spPr>
+          <a:xfrm>
+            <a:off x="975335" y="1234439"/>
+            <a:ext cx="3657508" cy="4526280"/>
+          </a:xfrm>
+          <a:prstGeom prst="roundRect">
+            <a:avLst>
+              <a:gd name="adj" fmla="val 4000"/>
+            </a:avLst>
+          </a:prstGeom>
+          <a:noFill/>
+          <a:ln w="9525">
+            <a:solidFill>
+              <a:srgbClr val="26231F"/>
+            </a:solidFill>
+          </a:ln>
+        </p:spPr>
+        <p:txBody>
+          <a:bodyPr rtlCol="0" anchor="ctr"/>
+          <a:lstStyle/>
+          <a:p>
+            <a:pPr algn="ctr"/>
+          </a:p>
+        </p:txBody>
+      </p:sp>
+      <p:sp>
+        <p:nvSpPr>
+          <p:cNvPr id="5" name="라벨"/>
+          <p:cNvSpPr txBox="1"/>
+          <p:nvPr/>
+        </p:nvSpPr>
+        <p:spPr>
+          <a:xfrm>
+            <a:off x="6827349" y="2148840"/>
+            <a:ext cx="4632844" cy="274320"/>
           </a:xfrm>
           <a:prstGeom prst="rect">
             <a:avLst/>
           </a:prstGeom>
-        </p:spPr>
-      </p:pic>
+          <a:noFill/>
+        </p:spPr>
+        <p:txBody>
+          <a:bodyPr wrap="square" lIns="54864" rIns="54864" tIns="27432" bIns="27432" anchor="t">
+            <a:noAutofit/>
+          </a:bodyPr>
+          <a:lstStyle/>
+          <a:p>
+            <a:pPr algn="l">
+              <a:lnSpc>
+                <a:spcPct val="115000"/>
+              </a:lnSpc>
+            </a:pPr>
+            <a:r>
+              <a:rPr sz="1000" b="1" i="0" spc="250">
+                <a:solidFill>
+                  <a:srgbClr val="26231F"/>
+                </a:solidFill>
+              </a:rPr>
+              <a:t>FIRST BIRTHDAY</a:t>
+            </a:r>
+          </a:p>
+        </p:txBody>
+      </p:sp>
       <p:sp>
         <p:nvSpPr>
           <p:cNvPr id="2" name="Title 1"/>
@@ -5693,8 +6133,8 @@
         </p:nvSpPr>
         <p:spPr>
           <a:xfrm>
-            <a:off x="853418" y="2057400"/>
-            <a:ext cx="6095847" cy="1554480"/>
+            <a:off x="6827349" y="2606040"/>
+            <a:ext cx="4632844" cy="1188720"/>
           </a:xfrm>
         </p:spPr>
         <p:txBody>
@@ -5711,7 +6151,7 @@
             <a:r>
               <a:rPr sz="3400" b="1" i="0">
                 <a:solidFill>
-                  <a:srgbClr val="113B5F"/>
+                  <a:srgbClr val="26231F"/>
                 </a:solidFill>
               </a:rPr>
               <a:t>와 주셔서 고맙습니다</a:t>
@@ -5721,14 +6161,14 @@
       </p:sp>
       <p:sp>
         <p:nvSpPr>
-          <p:cNvPr id="4" name="한 줄 문구"/>
+          <p:cNvPr id="6" name="한 줄 문구"/>
           <p:cNvSpPr txBox="1"/>
           <p:nvPr/>
         </p:nvSpPr>
         <p:spPr>
           <a:xfrm>
-            <a:off x="853418" y="3749039"/>
-            <a:ext cx="6095847" cy="822960"/>
+            <a:off x="6827349" y="3886200"/>
+            <a:ext cx="4632844" cy="822960"/>
           </a:xfrm>
           <a:prstGeom prst="rect">
             <a:avLst/>
@@ -5747,9 +6187,9 @@
               </a:lnSpc>
             </a:pPr>
             <a:r>
-              <a:rPr sz="1700" b="0" i="1">
-                <a:solidFill>
-                  <a:srgbClr val="113B5F"/>
+              <a:rPr sz="1700" b="0" i="0">
+                <a:solidFill>
+                  <a:srgbClr val="26231F"/>
                 </a:solidFill>
               </a:rPr>
               <a:t>아이가 한 살이 되었습니다</a:t>
@@ -5759,14 +6199,14 @@
       </p:sp>
       <p:sp>
         <p:nvSpPr>
-          <p:cNvPr id="5" name="안내 문구"/>
+          <p:cNvPr id="7" name="안내 문구"/>
           <p:cNvSpPr txBox="1"/>
           <p:nvPr/>
         </p:nvSpPr>
         <p:spPr>
           <a:xfrm>
-            <a:off x="853418" y="4617720"/>
-            <a:ext cx="6095847" cy="914400"/>
+            <a:off x="6827349" y="4754880"/>
+            <a:ext cx="4632844" cy="914400"/>
           </a:xfrm>
           <a:prstGeom prst="rect">
             <a:avLst/>
@@ -5787,7 +6227,7 @@
             <a:r>
               <a:rPr sz="1400" b="0" i="0">
                 <a:solidFill>
-                  <a:srgbClr val="666666"/>
+                  <a:srgbClr val="26231F"/>
                 </a:solidFill>
               </a:rPr>
               <a:t>아기 이름 · 부모 이름</a:t>
@@ -5814,34 +6254,34 @@
         <a:sysClr val="window" lastClr="FFFFFF"/>
       </a:lt1>
       <a:dk2>
-        <a:srgbClr val="113B5F"/>
+        <a:srgbClr val="273949"/>
       </a:dk2>
       <a:lt2>
-        <a:srgbClr val="EEF5FC"/>
+        <a:srgbClr val="EAF4FD"/>
       </a:lt2>
       <a:accent1>
-        <a:srgbClr val="267BC5"/>
+        <a:srgbClr val="7BB6EA"/>
       </a:accent1>
       <a:accent2>
-        <a:srgbClr val="209DB6"/>
+        <a:srgbClr val="9FA4EF"/>
       </a:accent2>
       <a:accent3>
-        <a:srgbClr val="113B5F"/>
+        <a:srgbClr val="273949"/>
       </a:accent3>
       <a:accent4>
         <a:srgbClr val="D1E7FA"/>
       </a:accent4>
       <a:accent5>
-        <a:srgbClr val="238CBE"/>
+        <a:srgbClr val="8DADEC"/>
       </a:accent5>
       <a:accent6>
-        <a:srgbClr val="70899F"/>
+        <a:srgbClr val="7D8892"/>
       </a:accent6>
       <a:hlink>
-        <a:srgbClr val="267BC5"/>
+        <a:srgbClr val="7BB6EA"/>
       </a:hlink>
       <a:folHlink>
-        <a:srgbClr val="113B5F"/>
+        <a:srgbClr val="273949"/>
       </a:folHlink>
     </a:clrScheme>
     <a:fontScheme name="Office">
